--- a/Supp Data/Fig S14.pptx
+++ b/Supp Data/Fig S14.pptx
@@ -2,7 +2,7 @@
 <file path=ppt/presentation.xml><?xml version="1.0" encoding="utf-8"?>
 <p:presentation xmlns:a="http://schemas.openxmlformats.org/drawingml/2006/main" xmlns:r="http://schemas.openxmlformats.org/officeDocument/2006/relationships" xmlns:p="http://schemas.openxmlformats.org/presentationml/2006/main" saveSubsetFonts="1" autoCompressPictures="0">
   <p:sldMasterIdLst>
-    <p:sldMasterId id="2147483816" r:id="rId1"/>
+    <p:sldMasterId id="2147483828" r:id="rId1"/>
   </p:sldMasterIdLst>
   <p:notesMasterIdLst>
     <p:notesMasterId r:id="rId3"/>
@@ -10,7 +10,7 @@
   <p:sldIdLst>
     <p:sldId id="281" r:id="rId2"/>
   </p:sldIdLst>
-  <p:sldSz cx="1908175" cy="936625"/>
+  <p:sldSz cx="1908175" cy="1871663"/>
   <p:notesSz cx="6858000" cy="9144000"/>
   <p:defaultTextStyle>
     <a:defPPr>
@@ -197,7 +197,7 @@
           <a:p>
             <a:fld id="{810CFC23-F338-EB41-8653-4316F1EF48B5}" type="datetimeFigureOut">
               <a:rPr lang="en-DE" smtClean="0"/>
-              <a:t>07.05.26</a:t>
+              <a:t>20.05.26</a:t>
             </a:fld>
             <a:endParaRPr lang="en-DE"/>
           </a:p>
@@ -215,8 +215,8 @@
         </p:nvSpPr>
         <p:spPr>
           <a:xfrm>
-            <a:off x="285750" y="1143000"/>
-            <a:ext cx="6286500" cy="3086100"/>
+            <a:off x="1855788" y="1143000"/>
+            <a:ext cx="3146425" cy="3086100"/>
           </a:xfrm>
           <a:prstGeom prst="rect">
             <a:avLst/>
@@ -494,15 +494,15 @@
         </p:nvSpPr>
         <p:spPr>
           <a:xfrm>
-            <a:off x="238522" y="153286"/>
-            <a:ext cx="1431131" cy="326084"/>
+            <a:off x="143113" y="306312"/>
+            <a:ext cx="1621949" cy="651616"/>
           </a:xfrm>
         </p:spPr>
         <p:txBody>
           <a:bodyPr anchor="b"/>
           <a:lstStyle>
             <a:lvl1pPr algn="ctr">
-              <a:defRPr sz="820"/>
+              <a:defRPr sz="1252"/>
             </a:lvl1pPr>
           </a:lstStyle>
           <a:p>
@@ -526,8 +526,8 @@
         </p:nvSpPr>
         <p:spPr>
           <a:xfrm>
-            <a:off x="238522" y="491945"/>
-            <a:ext cx="1431131" cy="226134"/>
+            <a:off x="238522" y="983057"/>
+            <a:ext cx="1431131" cy="451885"/>
           </a:xfrm>
         </p:spPr>
         <p:txBody>
@@ -535,39 +535,39 @@
           <a:lstStyle>
             <a:lvl1pPr marL="0" indent="0" algn="ctr">
               <a:buNone/>
-              <a:defRPr sz="328"/>
+              <a:defRPr sz="501"/>
             </a:lvl1pPr>
-            <a:lvl2pPr marL="62454" indent="0" algn="ctr">
-              <a:buNone/>
-              <a:defRPr sz="273"/>
+            <a:lvl2pPr marL="95418" indent="0" algn="ctr">
+              <a:buNone/>
+              <a:defRPr sz="417"/>
             </a:lvl2pPr>
-            <a:lvl3pPr marL="124907" indent="0" algn="ctr">
-              <a:buNone/>
-              <a:defRPr sz="246"/>
+            <a:lvl3pPr marL="190835" indent="0" algn="ctr">
+              <a:buNone/>
+              <a:defRPr sz="376"/>
             </a:lvl3pPr>
-            <a:lvl4pPr marL="187361" indent="0" algn="ctr">
-              <a:buNone/>
-              <a:defRPr sz="219"/>
+            <a:lvl4pPr marL="286253" indent="0" algn="ctr">
+              <a:buNone/>
+              <a:defRPr sz="334"/>
             </a:lvl4pPr>
-            <a:lvl5pPr marL="249814" indent="0" algn="ctr">
-              <a:buNone/>
-              <a:defRPr sz="219"/>
+            <a:lvl5pPr marL="381671" indent="0" algn="ctr">
+              <a:buNone/>
+              <a:defRPr sz="334"/>
             </a:lvl5pPr>
-            <a:lvl6pPr marL="312268" indent="0" algn="ctr">
-              <a:buNone/>
-              <a:defRPr sz="219"/>
+            <a:lvl6pPr marL="477088" indent="0" algn="ctr">
+              <a:buNone/>
+              <a:defRPr sz="334"/>
             </a:lvl6pPr>
-            <a:lvl7pPr marL="374721" indent="0" algn="ctr">
-              <a:buNone/>
-              <a:defRPr sz="219"/>
+            <a:lvl7pPr marL="572506" indent="0" algn="ctr">
+              <a:buNone/>
+              <a:defRPr sz="334"/>
             </a:lvl7pPr>
-            <a:lvl8pPr marL="437175" indent="0" algn="ctr">
-              <a:buNone/>
-              <a:defRPr sz="219"/>
+            <a:lvl8pPr marL="667923" indent="0" algn="ctr">
+              <a:buNone/>
+              <a:defRPr sz="334"/>
             </a:lvl8pPr>
-            <a:lvl9pPr marL="499628" indent="0" algn="ctr">
-              <a:buNone/>
-              <a:defRPr sz="219"/>
+            <a:lvl9pPr marL="763341" indent="0" algn="ctr">
+              <a:buNone/>
+              <a:defRPr sz="334"/>
             </a:lvl9pPr>
           </a:lstStyle>
           <a:p>
@@ -596,7 +596,7 @@
           <a:p>
             <a:fld id="{CF9FBDB8-36C6-4744-999D-C99C2C96D370}" type="datetimeFigureOut">
               <a:rPr lang="en-DE" smtClean="0"/>
-              <a:t>07.05.26</a:t>
+              <a:t>20.05.26</a:t>
             </a:fld>
             <a:endParaRPr lang="en-DE"/>
           </a:p>
@@ -647,7 +647,7 @@
     </p:spTree>
     <p:extLst>
       <p:ext uri="{BB962C8B-B14F-4D97-AF65-F5344CB8AC3E}">
-        <p14:creationId xmlns:p14="http://schemas.microsoft.com/office/powerpoint/2010/main" val="1067634796"/>
+        <p14:creationId xmlns:p14="http://schemas.microsoft.com/office/powerpoint/2010/main" val="3169246803"/>
       </p:ext>
     </p:extLst>
   </p:cSld>
@@ -766,7 +766,7 @@
           <a:p>
             <a:fld id="{CF9FBDB8-36C6-4744-999D-C99C2C96D370}" type="datetimeFigureOut">
               <a:rPr lang="en-DE" smtClean="0"/>
-              <a:t>07.05.26</a:t>
+              <a:t>20.05.26</a:t>
             </a:fld>
             <a:endParaRPr lang="en-DE"/>
           </a:p>
@@ -817,7 +817,7 @@
     </p:spTree>
     <p:extLst>
       <p:ext uri="{BB962C8B-B14F-4D97-AF65-F5344CB8AC3E}">
-        <p14:creationId xmlns:p14="http://schemas.microsoft.com/office/powerpoint/2010/main" val="4272229239"/>
+        <p14:creationId xmlns:p14="http://schemas.microsoft.com/office/powerpoint/2010/main" val="2851412103"/>
       </p:ext>
     </p:extLst>
   </p:cSld>
@@ -856,8 +856,8 @@
         </p:nvSpPr>
         <p:spPr>
           <a:xfrm>
-            <a:off x="1365538" y="49867"/>
-            <a:ext cx="411450" cy="793746"/>
+            <a:off x="1365538" y="99649"/>
+            <a:ext cx="411450" cy="1586148"/>
           </a:xfrm>
         </p:spPr>
         <p:txBody>
@@ -884,8 +884,8 @@
         </p:nvSpPr>
         <p:spPr>
           <a:xfrm>
-            <a:off x="131187" y="49867"/>
-            <a:ext cx="1210499" cy="793746"/>
+            <a:off x="131187" y="99649"/>
+            <a:ext cx="1210499" cy="1586148"/>
           </a:xfrm>
         </p:spPr>
         <p:txBody>
@@ -946,7 +946,7 @@
           <a:p>
             <a:fld id="{CF9FBDB8-36C6-4744-999D-C99C2C96D370}" type="datetimeFigureOut">
               <a:rPr lang="en-DE" smtClean="0"/>
-              <a:t>07.05.26</a:t>
+              <a:t>20.05.26</a:t>
             </a:fld>
             <a:endParaRPr lang="en-DE"/>
           </a:p>
@@ -997,7 +997,7 @@
     </p:spTree>
     <p:extLst>
       <p:ext uri="{BB962C8B-B14F-4D97-AF65-F5344CB8AC3E}">
-        <p14:creationId xmlns:p14="http://schemas.microsoft.com/office/powerpoint/2010/main" val="1019311083"/>
+        <p14:creationId xmlns:p14="http://schemas.microsoft.com/office/powerpoint/2010/main" val="1822407258"/>
       </p:ext>
     </p:extLst>
   </p:cSld>
@@ -1116,7 +1116,7 @@
           <a:p>
             <a:fld id="{CF9FBDB8-36C6-4744-999D-C99C2C96D370}" type="datetimeFigureOut">
               <a:rPr lang="en-DE" smtClean="0"/>
-              <a:t>07.05.26</a:t>
+              <a:t>20.05.26</a:t>
             </a:fld>
             <a:endParaRPr lang="en-DE"/>
           </a:p>
@@ -1167,7 +1167,7 @@
     </p:spTree>
     <p:extLst>
       <p:ext uri="{BB962C8B-B14F-4D97-AF65-F5344CB8AC3E}">
-        <p14:creationId xmlns:p14="http://schemas.microsoft.com/office/powerpoint/2010/main" val="3109620872"/>
+        <p14:creationId xmlns:p14="http://schemas.microsoft.com/office/powerpoint/2010/main" val="533391445"/>
       </p:ext>
     </p:extLst>
   </p:cSld>
@@ -1206,15 +1206,15 @@
         </p:nvSpPr>
         <p:spPr>
           <a:xfrm>
-            <a:off x="130193" y="233506"/>
-            <a:ext cx="1645801" cy="389610"/>
+            <a:off x="130193" y="466616"/>
+            <a:ext cx="1645801" cy="778560"/>
           </a:xfrm>
         </p:spPr>
         <p:txBody>
           <a:bodyPr anchor="b"/>
           <a:lstStyle>
             <a:lvl1pPr>
-              <a:defRPr sz="820"/>
+              <a:defRPr sz="1252"/>
             </a:lvl1pPr>
           </a:lstStyle>
           <a:p>
@@ -1238,8 +1238,8 @@
         </p:nvSpPr>
         <p:spPr>
           <a:xfrm>
-            <a:off x="130193" y="626802"/>
-            <a:ext cx="1645801" cy="204887"/>
+            <a:off x="130193" y="1252542"/>
+            <a:ext cx="1645801" cy="409426"/>
           </a:xfrm>
         </p:spPr>
         <p:txBody>
@@ -1247,7 +1247,7 @@
           <a:lstStyle>
             <a:lvl1pPr marL="0" indent="0">
               <a:buNone/>
-              <a:defRPr sz="328">
+              <a:defRPr sz="501">
                 <a:solidFill>
                   <a:schemeClr val="tx1">
                     <a:tint val="82000"/>
@@ -1255,9 +1255,9 @@
                 </a:solidFill>
               </a:defRPr>
             </a:lvl1pPr>
-            <a:lvl2pPr marL="62454" indent="0">
-              <a:buNone/>
-              <a:defRPr sz="273">
+            <a:lvl2pPr marL="95418" indent="0">
+              <a:buNone/>
+              <a:defRPr sz="417">
                 <a:solidFill>
                   <a:schemeClr val="tx1">
                     <a:tint val="82000"/>
@@ -1265,9 +1265,9 @@
                 </a:solidFill>
               </a:defRPr>
             </a:lvl2pPr>
-            <a:lvl3pPr marL="124907" indent="0">
-              <a:buNone/>
-              <a:defRPr sz="246">
+            <a:lvl3pPr marL="190835" indent="0">
+              <a:buNone/>
+              <a:defRPr sz="376">
                 <a:solidFill>
                   <a:schemeClr val="tx1">
                     <a:tint val="82000"/>
@@ -1275,9 +1275,9 @@
                 </a:solidFill>
               </a:defRPr>
             </a:lvl3pPr>
-            <a:lvl4pPr marL="187361" indent="0">
-              <a:buNone/>
-              <a:defRPr sz="219">
+            <a:lvl4pPr marL="286253" indent="0">
+              <a:buNone/>
+              <a:defRPr sz="334">
                 <a:solidFill>
                   <a:schemeClr val="tx1">
                     <a:tint val="82000"/>
@@ -1285,9 +1285,9 @@
                 </a:solidFill>
               </a:defRPr>
             </a:lvl4pPr>
-            <a:lvl5pPr marL="249814" indent="0">
-              <a:buNone/>
-              <a:defRPr sz="219">
+            <a:lvl5pPr marL="381671" indent="0">
+              <a:buNone/>
+              <a:defRPr sz="334">
                 <a:solidFill>
                   <a:schemeClr val="tx1">
                     <a:tint val="82000"/>
@@ -1295,9 +1295,9 @@
                 </a:solidFill>
               </a:defRPr>
             </a:lvl5pPr>
-            <a:lvl6pPr marL="312268" indent="0">
-              <a:buNone/>
-              <a:defRPr sz="219">
+            <a:lvl6pPr marL="477088" indent="0">
+              <a:buNone/>
+              <a:defRPr sz="334">
                 <a:solidFill>
                   <a:schemeClr val="tx1">
                     <a:tint val="82000"/>
@@ -1305,9 +1305,9 @@
                 </a:solidFill>
               </a:defRPr>
             </a:lvl6pPr>
-            <a:lvl7pPr marL="374721" indent="0">
-              <a:buNone/>
-              <a:defRPr sz="219">
+            <a:lvl7pPr marL="572506" indent="0">
+              <a:buNone/>
+              <a:defRPr sz="334">
                 <a:solidFill>
                   <a:schemeClr val="tx1">
                     <a:tint val="82000"/>
@@ -1315,9 +1315,9 @@
                 </a:solidFill>
               </a:defRPr>
             </a:lvl7pPr>
-            <a:lvl8pPr marL="437175" indent="0">
-              <a:buNone/>
-              <a:defRPr sz="219">
+            <a:lvl8pPr marL="667923" indent="0">
+              <a:buNone/>
+              <a:defRPr sz="334">
                 <a:solidFill>
                   <a:schemeClr val="tx1">
                     <a:tint val="82000"/>
@@ -1325,9 +1325,9 @@
                 </a:solidFill>
               </a:defRPr>
             </a:lvl8pPr>
-            <a:lvl9pPr marL="499628" indent="0">
-              <a:buNone/>
-              <a:defRPr sz="219">
+            <a:lvl9pPr marL="763341" indent="0">
+              <a:buNone/>
+              <a:defRPr sz="334">
                 <a:solidFill>
                   <a:schemeClr val="tx1">
                     <a:tint val="82000"/>
@@ -1362,7 +1362,7 @@
           <a:p>
             <a:fld id="{CF9FBDB8-36C6-4744-999D-C99C2C96D370}" type="datetimeFigureOut">
               <a:rPr lang="en-DE" smtClean="0"/>
-              <a:t>07.05.26</a:t>
+              <a:t>20.05.26</a:t>
             </a:fld>
             <a:endParaRPr lang="en-DE"/>
           </a:p>
@@ -1413,7 +1413,7 @@
     </p:spTree>
     <p:extLst>
       <p:ext uri="{BB962C8B-B14F-4D97-AF65-F5344CB8AC3E}">
-        <p14:creationId xmlns:p14="http://schemas.microsoft.com/office/powerpoint/2010/main" val="2489066962"/>
+        <p14:creationId xmlns:p14="http://schemas.microsoft.com/office/powerpoint/2010/main" val="829573862"/>
       </p:ext>
     </p:extLst>
   </p:cSld>
@@ -1475,8 +1475,8 @@
         </p:nvSpPr>
         <p:spPr>
           <a:xfrm>
-            <a:off x="131187" y="249333"/>
-            <a:ext cx="810974" cy="594280"/>
+            <a:off x="131187" y="498244"/>
+            <a:ext cx="810974" cy="1187553"/>
           </a:xfrm>
         </p:spPr>
         <p:txBody>
@@ -1532,8 +1532,8 @@
         </p:nvSpPr>
         <p:spPr>
           <a:xfrm>
-            <a:off x="966014" y="249333"/>
-            <a:ext cx="810974" cy="594280"/>
+            <a:off x="966014" y="498244"/>
+            <a:ext cx="810974" cy="1187553"/>
           </a:xfrm>
         </p:spPr>
         <p:txBody>
@@ -1594,7 +1594,7 @@
           <a:p>
             <a:fld id="{CF9FBDB8-36C6-4744-999D-C99C2C96D370}" type="datetimeFigureOut">
               <a:rPr lang="en-DE" smtClean="0"/>
-              <a:t>07.05.26</a:t>
+              <a:t>20.05.26</a:t>
             </a:fld>
             <a:endParaRPr lang="en-DE"/>
           </a:p>
@@ -1645,7 +1645,7 @@
     </p:spTree>
     <p:extLst>
       <p:ext uri="{BB962C8B-B14F-4D97-AF65-F5344CB8AC3E}">
-        <p14:creationId xmlns:p14="http://schemas.microsoft.com/office/powerpoint/2010/main" val="3127703835"/>
+        <p14:creationId xmlns:p14="http://schemas.microsoft.com/office/powerpoint/2010/main" val="4133595532"/>
       </p:ext>
     </p:extLst>
   </p:cSld>
@@ -1684,8 +1684,8 @@
         </p:nvSpPr>
         <p:spPr>
           <a:xfrm>
-            <a:off x="131436" y="49866"/>
-            <a:ext cx="1645801" cy="181038"/>
+            <a:off x="131436" y="99649"/>
+            <a:ext cx="1645801" cy="361768"/>
           </a:xfrm>
         </p:spPr>
         <p:txBody>
@@ -1712,8 +1712,8 @@
         </p:nvSpPr>
         <p:spPr>
           <a:xfrm>
-            <a:off x="131436" y="229603"/>
-            <a:ext cx="807247" cy="112525"/>
+            <a:off x="131436" y="458818"/>
+            <a:ext cx="807247" cy="224859"/>
           </a:xfrm>
         </p:spPr>
         <p:txBody>
@@ -1721,39 +1721,39 @@
           <a:lstStyle>
             <a:lvl1pPr marL="0" indent="0">
               <a:buNone/>
-              <a:defRPr sz="328" b="1"/>
+              <a:defRPr sz="501" b="1"/>
             </a:lvl1pPr>
-            <a:lvl2pPr marL="62454" indent="0">
-              <a:buNone/>
-              <a:defRPr sz="273" b="1"/>
+            <a:lvl2pPr marL="95418" indent="0">
+              <a:buNone/>
+              <a:defRPr sz="417" b="1"/>
             </a:lvl2pPr>
-            <a:lvl3pPr marL="124907" indent="0">
-              <a:buNone/>
-              <a:defRPr sz="246" b="1"/>
+            <a:lvl3pPr marL="190835" indent="0">
+              <a:buNone/>
+              <a:defRPr sz="376" b="1"/>
             </a:lvl3pPr>
-            <a:lvl4pPr marL="187361" indent="0">
-              <a:buNone/>
-              <a:defRPr sz="219" b="1"/>
+            <a:lvl4pPr marL="286253" indent="0">
+              <a:buNone/>
+              <a:defRPr sz="334" b="1"/>
             </a:lvl4pPr>
-            <a:lvl5pPr marL="249814" indent="0">
-              <a:buNone/>
-              <a:defRPr sz="219" b="1"/>
+            <a:lvl5pPr marL="381671" indent="0">
+              <a:buNone/>
+              <a:defRPr sz="334" b="1"/>
             </a:lvl5pPr>
-            <a:lvl6pPr marL="312268" indent="0">
-              <a:buNone/>
-              <a:defRPr sz="219" b="1"/>
+            <a:lvl6pPr marL="477088" indent="0">
+              <a:buNone/>
+              <a:defRPr sz="334" b="1"/>
             </a:lvl6pPr>
-            <a:lvl7pPr marL="374721" indent="0">
-              <a:buNone/>
-              <a:defRPr sz="219" b="1"/>
+            <a:lvl7pPr marL="572506" indent="0">
+              <a:buNone/>
+              <a:defRPr sz="334" b="1"/>
             </a:lvl7pPr>
-            <a:lvl8pPr marL="437175" indent="0">
-              <a:buNone/>
-              <a:defRPr sz="219" b="1"/>
+            <a:lvl8pPr marL="667923" indent="0">
+              <a:buNone/>
+              <a:defRPr sz="334" b="1"/>
             </a:lvl8pPr>
-            <a:lvl9pPr marL="499628" indent="0">
-              <a:buNone/>
-              <a:defRPr sz="219" b="1"/>
+            <a:lvl9pPr marL="763341" indent="0">
+              <a:buNone/>
+              <a:defRPr sz="334" b="1"/>
             </a:lvl9pPr>
           </a:lstStyle>
           <a:p>
@@ -1777,8 +1777,8 @@
         </p:nvSpPr>
         <p:spPr>
           <a:xfrm>
-            <a:off x="131436" y="342128"/>
-            <a:ext cx="807247" cy="503219"/>
+            <a:off x="131436" y="683677"/>
+            <a:ext cx="807247" cy="1005586"/>
           </a:xfrm>
         </p:spPr>
         <p:txBody>
@@ -1834,8 +1834,8 @@
         </p:nvSpPr>
         <p:spPr>
           <a:xfrm>
-            <a:off x="966014" y="229603"/>
-            <a:ext cx="811223" cy="112525"/>
+            <a:off x="966014" y="458818"/>
+            <a:ext cx="811223" cy="224859"/>
           </a:xfrm>
         </p:spPr>
         <p:txBody>
@@ -1843,39 +1843,39 @@
           <a:lstStyle>
             <a:lvl1pPr marL="0" indent="0">
               <a:buNone/>
-              <a:defRPr sz="328" b="1"/>
+              <a:defRPr sz="501" b="1"/>
             </a:lvl1pPr>
-            <a:lvl2pPr marL="62454" indent="0">
-              <a:buNone/>
-              <a:defRPr sz="273" b="1"/>
+            <a:lvl2pPr marL="95418" indent="0">
+              <a:buNone/>
+              <a:defRPr sz="417" b="1"/>
             </a:lvl2pPr>
-            <a:lvl3pPr marL="124907" indent="0">
-              <a:buNone/>
-              <a:defRPr sz="246" b="1"/>
+            <a:lvl3pPr marL="190835" indent="0">
+              <a:buNone/>
+              <a:defRPr sz="376" b="1"/>
             </a:lvl3pPr>
-            <a:lvl4pPr marL="187361" indent="0">
-              <a:buNone/>
-              <a:defRPr sz="219" b="1"/>
+            <a:lvl4pPr marL="286253" indent="0">
+              <a:buNone/>
+              <a:defRPr sz="334" b="1"/>
             </a:lvl4pPr>
-            <a:lvl5pPr marL="249814" indent="0">
-              <a:buNone/>
-              <a:defRPr sz="219" b="1"/>
+            <a:lvl5pPr marL="381671" indent="0">
+              <a:buNone/>
+              <a:defRPr sz="334" b="1"/>
             </a:lvl5pPr>
-            <a:lvl6pPr marL="312268" indent="0">
-              <a:buNone/>
-              <a:defRPr sz="219" b="1"/>
+            <a:lvl6pPr marL="477088" indent="0">
+              <a:buNone/>
+              <a:defRPr sz="334" b="1"/>
             </a:lvl6pPr>
-            <a:lvl7pPr marL="374721" indent="0">
-              <a:buNone/>
-              <a:defRPr sz="219" b="1"/>
+            <a:lvl7pPr marL="572506" indent="0">
+              <a:buNone/>
+              <a:defRPr sz="334" b="1"/>
             </a:lvl7pPr>
-            <a:lvl8pPr marL="437175" indent="0">
-              <a:buNone/>
-              <a:defRPr sz="219" b="1"/>
+            <a:lvl8pPr marL="667923" indent="0">
+              <a:buNone/>
+              <a:defRPr sz="334" b="1"/>
             </a:lvl8pPr>
-            <a:lvl9pPr marL="499628" indent="0">
-              <a:buNone/>
-              <a:defRPr sz="219" b="1"/>
+            <a:lvl9pPr marL="763341" indent="0">
+              <a:buNone/>
+              <a:defRPr sz="334" b="1"/>
             </a:lvl9pPr>
           </a:lstStyle>
           <a:p>
@@ -1899,8 +1899,8 @@
         </p:nvSpPr>
         <p:spPr>
           <a:xfrm>
-            <a:off x="966014" y="342128"/>
-            <a:ext cx="811223" cy="503219"/>
+            <a:off x="966014" y="683677"/>
+            <a:ext cx="811223" cy="1005586"/>
           </a:xfrm>
         </p:spPr>
         <p:txBody>
@@ -1961,7 +1961,7 @@
           <a:p>
             <a:fld id="{CF9FBDB8-36C6-4744-999D-C99C2C96D370}" type="datetimeFigureOut">
               <a:rPr lang="en-DE" smtClean="0"/>
-              <a:t>07.05.26</a:t>
+              <a:t>20.05.26</a:t>
             </a:fld>
             <a:endParaRPr lang="en-DE"/>
           </a:p>
@@ -2012,7 +2012,7 @@
     </p:spTree>
     <p:extLst>
       <p:ext uri="{BB962C8B-B14F-4D97-AF65-F5344CB8AC3E}">
-        <p14:creationId xmlns:p14="http://schemas.microsoft.com/office/powerpoint/2010/main" val="1162751277"/>
+        <p14:creationId xmlns:p14="http://schemas.microsoft.com/office/powerpoint/2010/main" val="2536637699"/>
       </p:ext>
     </p:extLst>
   </p:cSld>
@@ -2079,7 +2079,7 @@
           <a:p>
             <a:fld id="{CF9FBDB8-36C6-4744-999D-C99C2C96D370}" type="datetimeFigureOut">
               <a:rPr lang="en-DE" smtClean="0"/>
-              <a:t>07.05.26</a:t>
+              <a:t>20.05.26</a:t>
             </a:fld>
             <a:endParaRPr lang="en-DE"/>
           </a:p>
@@ -2130,7 +2130,7 @@
     </p:spTree>
     <p:extLst>
       <p:ext uri="{BB962C8B-B14F-4D97-AF65-F5344CB8AC3E}">
-        <p14:creationId xmlns:p14="http://schemas.microsoft.com/office/powerpoint/2010/main" val="1061270877"/>
+        <p14:creationId xmlns:p14="http://schemas.microsoft.com/office/powerpoint/2010/main" val="2082714853"/>
       </p:ext>
     </p:extLst>
   </p:cSld>
@@ -2174,7 +2174,7 @@
           <a:p>
             <a:fld id="{CF9FBDB8-36C6-4744-999D-C99C2C96D370}" type="datetimeFigureOut">
               <a:rPr lang="en-DE" smtClean="0"/>
-              <a:t>07.05.26</a:t>
+              <a:t>20.05.26</a:t>
             </a:fld>
             <a:endParaRPr lang="en-DE"/>
           </a:p>
@@ -2225,7 +2225,7 @@
     </p:spTree>
     <p:extLst>
       <p:ext uri="{BB962C8B-B14F-4D97-AF65-F5344CB8AC3E}">
-        <p14:creationId xmlns:p14="http://schemas.microsoft.com/office/powerpoint/2010/main" val="2895280816"/>
+        <p14:creationId xmlns:p14="http://schemas.microsoft.com/office/powerpoint/2010/main" val="807550524"/>
       </p:ext>
     </p:extLst>
   </p:cSld>
@@ -2264,15 +2264,15 @@
         </p:nvSpPr>
         <p:spPr>
           <a:xfrm>
-            <a:off x="131436" y="62442"/>
-            <a:ext cx="615436" cy="218546"/>
+            <a:off x="131436" y="124778"/>
+            <a:ext cx="615436" cy="436721"/>
           </a:xfrm>
         </p:spPr>
         <p:txBody>
           <a:bodyPr anchor="b"/>
           <a:lstStyle>
             <a:lvl1pPr>
-              <a:defRPr sz="437"/>
+              <a:defRPr sz="668"/>
             </a:lvl1pPr>
           </a:lstStyle>
           <a:p>
@@ -2296,39 +2296,39 @@
         </p:nvSpPr>
         <p:spPr>
           <a:xfrm>
-            <a:off x="811223" y="134857"/>
-            <a:ext cx="966014" cy="665611"/>
+            <a:off x="811223" y="269485"/>
+            <a:ext cx="966014" cy="1330094"/>
           </a:xfrm>
         </p:spPr>
         <p:txBody>
           <a:bodyPr/>
           <a:lstStyle>
             <a:lvl1pPr>
-              <a:defRPr sz="437"/>
+              <a:defRPr sz="668"/>
             </a:lvl1pPr>
             <a:lvl2pPr>
-              <a:defRPr sz="382"/>
+              <a:defRPr sz="584"/>
             </a:lvl2pPr>
             <a:lvl3pPr>
-              <a:defRPr sz="328"/>
+              <a:defRPr sz="501"/>
             </a:lvl3pPr>
             <a:lvl4pPr>
-              <a:defRPr sz="273"/>
+              <a:defRPr sz="417"/>
             </a:lvl4pPr>
             <a:lvl5pPr>
-              <a:defRPr sz="273"/>
+              <a:defRPr sz="417"/>
             </a:lvl5pPr>
             <a:lvl6pPr>
-              <a:defRPr sz="273"/>
+              <a:defRPr sz="417"/>
             </a:lvl6pPr>
             <a:lvl7pPr>
-              <a:defRPr sz="273"/>
+              <a:defRPr sz="417"/>
             </a:lvl7pPr>
             <a:lvl8pPr>
-              <a:defRPr sz="273"/>
+              <a:defRPr sz="417"/>
             </a:lvl8pPr>
             <a:lvl9pPr>
-              <a:defRPr sz="273"/>
+              <a:defRPr sz="417"/>
             </a:lvl9pPr>
           </a:lstStyle>
           <a:p>
@@ -2381,8 +2381,8 @@
         </p:nvSpPr>
         <p:spPr>
           <a:xfrm>
-            <a:off x="131436" y="280988"/>
-            <a:ext cx="615436" cy="520564"/>
+            <a:off x="131436" y="561499"/>
+            <a:ext cx="615436" cy="1040246"/>
           </a:xfrm>
         </p:spPr>
         <p:txBody>
@@ -2390,39 +2390,39 @@
           <a:lstStyle>
             <a:lvl1pPr marL="0" indent="0">
               <a:buNone/>
-              <a:defRPr sz="219"/>
+              <a:defRPr sz="334"/>
             </a:lvl1pPr>
-            <a:lvl2pPr marL="62454" indent="0">
-              <a:buNone/>
-              <a:defRPr sz="191"/>
+            <a:lvl2pPr marL="95418" indent="0">
+              <a:buNone/>
+              <a:defRPr sz="292"/>
             </a:lvl2pPr>
-            <a:lvl3pPr marL="124907" indent="0">
-              <a:buNone/>
-              <a:defRPr sz="164"/>
+            <a:lvl3pPr marL="190835" indent="0">
+              <a:buNone/>
+              <a:defRPr sz="250"/>
             </a:lvl3pPr>
-            <a:lvl4pPr marL="187361" indent="0">
-              <a:buNone/>
-              <a:defRPr sz="137"/>
+            <a:lvl4pPr marL="286253" indent="0">
+              <a:buNone/>
+              <a:defRPr sz="209"/>
             </a:lvl4pPr>
-            <a:lvl5pPr marL="249814" indent="0">
-              <a:buNone/>
-              <a:defRPr sz="137"/>
+            <a:lvl5pPr marL="381671" indent="0">
+              <a:buNone/>
+              <a:defRPr sz="209"/>
             </a:lvl5pPr>
-            <a:lvl6pPr marL="312268" indent="0">
-              <a:buNone/>
-              <a:defRPr sz="137"/>
+            <a:lvl6pPr marL="477088" indent="0">
+              <a:buNone/>
+              <a:defRPr sz="209"/>
             </a:lvl6pPr>
-            <a:lvl7pPr marL="374721" indent="0">
-              <a:buNone/>
-              <a:defRPr sz="137"/>
+            <a:lvl7pPr marL="572506" indent="0">
+              <a:buNone/>
+              <a:defRPr sz="209"/>
             </a:lvl7pPr>
-            <a:lvl8pPr marL="437175" indent="0">
-              <a:buNone/>
-              <a:defRPr sz="137"/>
+            <a:lvl8pPr marL="667923" indent="0">
+              <a:buNone/>
+              <a:defRPr sz="209"/>
             </a:lvl8pPr>
-            <a:lvl9pPr marL="499628" indent="0">
-              <a:buNone/>
-              <a:defRPr sz="137"/>
+            <a:lvl9pPr marL="763341" indent="0">
+              <a:buNone/>
+              <a:defRPr sz="209"/>
             </a:lvl9pPr>
           </a:lstStyle>
           <a:p>
@@ -2451,7 +2451,7 @@
           <a:p>
             <a:fld id="{CF9FBDB8-36C6-4744-999D-C99C2C96D370}" type="datetimeFigureOut">
               <a:rPr lang="en-DE" smtClean="0"/>
-              <a:t>07.05.26</a:t>
+              <a:t>20.05.26</a:t>
             </a:fld>
             <a:endParaRPr lang="en-DE"/>
           </a:p>
@@ -2502,7 +2502,7 @@
     </p:spTree>
     <p:extLst>
       <p:ext uri="{BB962C8B-B14F-4D97-AF65-F5344CB8AC3E}">
-        <p14:creationId xmlns:p14="http://schemas.microsoft.com/office/powerpoint/2010/main" val="2975829071"/>
+        <p14:creationId xmlns:p14="http://schemas.microsoft.com/office/powerpoint/2010/main" val="923758545"/>
       </p:ext>
     </p:extLst>
   </p:cSld>
@@ -2541,15 +2541,15 @@
         </p:nvSpPr>
         <p:spPr>
           <a:xfrm>
-            <a:off x="131436" y="62442"/>
-            <a:ext cx="615436" cy="218546"/>
+            <a:off x="131436" y="124778"/>
+            <a:ext cx="615436" cy="436721"/>
           </a:xfrm>
         </p:spPr>
         <p:txBody>
           <a:bodyPr anchor="b"/>
           <a:lstStyle>
             <a:lvl1pPr>
-              <a:defRPr sz="437"/>
+              <a:defRPr sz="668"/>
             </a:lvl1pPr>
           </a:lstStyle>
           <a:p>
@@ -2573,8 +2573,8 @@
         </p:nvSpPr>
         <p:spPr>
           <a:xfrm>
-            <a:off x="811223" y="134857"/>
-            <a:ext cx="966014" cy="665611"/>
+            <a:off x="811223" y="269485"/>
+            <a:ext cx="966014" cy="1330094"/>
           </a:xfrm>
         </p:spPr>
         <p:txBody>
@@ -2582,39 +2582,39 @@
           <a:lstStyle>
             <a:lvl1pPr marL="0" indent="0">
               <a:buNone/>
-              <a:defRPr sz="437"/>
+              <a:defRPr sz="668"/>
             </a:lvl1pPr>
-            <a:lvl2pPr marL="62454" indent="0">
-              <a:buNone/>
-              <a:defRPr sz="382"/>
+            <a:lvl2pPr marL="95418" indent="0">
+              <a:buNone/>
+              <a:defRPr sz="584"/>
             </a:lvl2pPr>
-            <a:lvl3pPr marL="124907" indent="0">
-              <a:buNone/>
-              <a:defRPr sz="328"/>
+            <a:lvl3pPr marL="190835" indent="0">
+              <a:buNone/>
+              <a:defRPr sz="501"/>
             </a:lvl3pPr>
-            <a:lvl4pPr marL="187361" indent="0">
-              <a:buNone/>
-              <a:defRPr sz="273"/>
+            <a:lvl4pPr marL="286253" indent="0">
+              <a:buNone/>
+              <a:defRPr sz="417"/>
             </a:lvl4pPr>
-            <a:lvl5pPr marL="249814" indent="0">
-              <a:buNone/>
-              <a:defRPr sz="273"/>
+            <a:lvl5pPr marL="381671" indent="0">
+              <a:buNone/>
+              <a:defRPr sz="417"/>
             </a:lvl5pPr>
-            <a:lvl6pPr marL="312268" indent="0">
-              <a:buNone/>
-              <a:defRPr sz="273"/>
+            <a:lvl6pPr marL="477088" indent="0">
+              <a:buNone/>
+              <a:defRPr sz="417"/>
             </a:lvl6pPr>
-            <a:lvl7pPr marL="374721" indent="0">
-              <a:buNone/>
-              <a:defRPr sz="273"/>
+            <a:lvl7pPr marL="572506" indent="0">
+              <a:buNone/>
+              <a:defRPr sz="417"/>
             </a:lvl7pPr>
-            <a:lvl8pPr marL="437175" indent="0">
-              <a:buNone/>
-              <a:defRPr sz="273"/>
+            <a:lvl8pPr marL="667923" indent="0">
+              <a:buNone/>
+              <a:defRPr sz="417"/>
             </a:lvl8pPr>
-            <a:lvl9pPr marL="499628" indent="0">
-              <a:buNone/>
-              <a:defRPr sz="273"/>
+            <a:lvl9pPr marL="763341" indent="0">
+              <a:buNone/>
+              <a:defRPr sz="417"/>
             </a:lvl9pPr>
           </a:lstStyle>
           <a:p>
@@ -2638,8 +2638,8 @@
         </p:nvSpPr>
         <p:spPr>
           <a:xfrm>
-            <a:off x="131436" y="280988"/>
-            <a:ext cx="615436" cy="520564"/>
+            <a:off x="131436" y="561499"/>
+            <a:ext cx="615436" cy="1040246"/>
           </a:xfrm>
         </p:spPr>
         <p:txBody>
@@ -2647,39 +2647,39 @@
           <a:lstStyle>
             <a:lvl1pPr marL="0" indent="0">
               <a:buNone/>
-              <a:defRPr sz="219"/>
+              <a:defRPr sz="334"/>
             </a:lvl1pPr>
-            <a:lvl2pPr marL="62454" indent="0">
-              <a:buNone/>
-              <a:defRPr sz="191"/>
+            <a:lvl2pPr marL="95418" indent="0">
+              <a:buNone/>
+              <a:defRPr sz="292"/>
             </a:lvl2pPr>
-            <a:lvl3pPr marL="124907" indent="0">
-              <a:buNone/>
-              <a:defRPr sz="164"/>
+            <a:lvl3pPr marL="190835" indent="0">
+              <a:buNone/>
+              <a:defRPr sz="250"/>
             </a:lvl3pPr>
-            <a:lvl4pPr marL="187361" indent="0">
-              <a:buNone/>
-              <a:defRPr sz="137"/>
+            <a:lvl4pPr marL="286253" indent="0">
+              <a:buNone/>
+              <a:defRPr sz="209"/>
             </a:lvl4pPr>
-            <a:lvl5pPr marL="249814" indent="0">
-              <a:buNone/>
-              <a:defRPr sz="137"/>
+            <a:lvl5pPr marL="381671" indent="0">
+              <a:buNone/>
+              <a:defRPr sz="209"/>
             </a:lvl5pPr>
-            <a:lvl6pPr marL="312268" indent="0">
-              <a:buNone/>
-              <a:defRPr sz="137"/>
+            <a:lvl6pPr marL="477088" indent="0">
+              <a:buNone/>
+              <a:defRPr sz="209"/>
             </a:lvl6pPr>
-            <a:lvl7pPr marL="374721" indent="0">
-              <a:buNone/>
-              <a:defRPr sz="137"/>
+            <a:lvl7pPr marL="572506" indent="0">
+              <a:buNone/>
+              <a:defRPr sz="209"/>
             </a:lvl7pPr>
-            <a:lvl8pPr marL="437175" indent="0">
-              <a:buNone/>
-              <a:defRPr sz="137"/>
+            <a:lvl8pPr marL="667923" indent="0">
+              <a:buNone/>
+              <a:defRPr sz="209"/>
             </a:lvl8pPr>
-            <a:lvl9pPr marL="499628" indent="0">
-              <a:buNone/>
-              <a:defRPr sz="137"/>
+            <a:lvl9pPr marL="763341" indent="0">
+              <a:buNone/>
+              <a:defRPr sz="209"/>
             </a:lvl9pPr>
           </a:lstStyle>
           <a:p>
@@ -2708,7 +2708,7 @@
           <a:p>
             <a:fld id="{CF9FBDB8-36C6-4744-999D-C99C2C96D370}" type="datetimeFigureOut">
               <a:rPr lang="en-DE" smtClean="0"/>
-              <a:t>07.05.26</a:t>
+              <a:t>20.05.26</a:t>
             </a:fld>
             <a:endParaRPr lang="en-DE"/>
           </a:p>
@@ -2759,7 +2759,7 @@
     </p:spTree>
     <p:extLst>
       <p:ext uri="{BB962C8B-B14F-4D97-AF65-F5344CB8AC3E}">
-        <p14:creationId xmlns:p14="http://schemas.microsoft.com/office/powerpoint/2010/main" val="2637616078"/>
+        <p14:creationId xmlns:p14="http://schemas.microsoft.com/office/powerpoint/2010/main" val="2157888256"/>
       </p:ext>
     </p:extLst>
   </p:cSld>
@@ -2803,8 +2803,8 @@
         </p:nvSpPr>
         <p:spPr>
           <a:xfrm>
-            <a:off x="131187" y="49866"/>
-            <a:ext cx="1645801" cy="181038"/>
+            <a:off x="131187" y="99649"/>
+            <a:ext cx="1645801" cy="361768"/>
           </a:xfrm>
           <a:prstGeom prst="rect">
             <a:avLst/>
@@ -2836,8 +2836,8 @@
         </p:nvSpPr>
         <p:spPr>
           <a:xfrm>
-            <a:off x="131187" y="249333"/>
-            <a:ext cx="1645801" cy="594280"/>
+            <a:off x="131187" y="498244"/>
+            <a:ext cx="1645801" cy="1187553"/>
           </a:xfrm>
           <a:prstGeom prst="rect">
             <a:avLst/>
@@ -2898,8 +2898,8 @@
         </p:nvSpPr>
         <p:spPr>
           <a:xfrm>
-            <a:off x="131187" y="868112"/>
-            <a:ext cx="429339" cy="49867"/>
+            <a:off x="131187" y="1734755"/>
+            <a:ext cx="429339" cy="99649"/>
           </a:xfrm>
           <a:prstGeom prst="rect">
             <a:avLst/>
@@ -2909,7 +2909,7 @@
           <a:bodyPr vert="horz" lIns="91440" tIns="45720" rIns="91440" bIns="45720" rtlCol="0" anchor="ctr"/>
           <a:lstStyle>
             <a:lvl1pPr algn="l">
-              <a:defRPr sz="164">
+              <a:defRPr sz="250">
                 <a:solidFill>
                   <a:schemeClr val="tx1">
                     <a:tint val="82000"/>
@@ -2921,7 +2921,7 @@
           <a:p>
             <a:fld id="{CF9FBDB8-36C6-4744-999D-C99C2C96D370}" type="datetimeFigureOut">
               <a:rPr lang="en-DE" smtClean="0"/>
-              <a:t>07.05.26</a:t>
+              <a:t>20.05.26</a:t>
             </a:fld>
             <a:endParaRPr lang="en-DE"/>
           </a:p>
@@ -2939,8 +2939,8 @@
         </p:nvSpPr>
         <p:spPr>
           <a:xfrm>
-            <a:off x="632083" y="868112"/>
-            <a:ext cx="644009" cy="49867"/>
+            <a:off x="632083" y="1734755"/>
+            <a:ext cx="644009" cy="99649"/>
           </a:xfrm>
           <a:prstGeom prst="rect">
             <a:avLst/>
@@ -2950,7 +2950,7 @@
           <a:bodyPr vert="horz" lIns="91440" tIns="45720" rIns="91440" bIns="45720" rtlCol="0" anchor="ctr"/>
           <a:lstStyle>
             <a:lvl1pPr algn="ctr">
-              <a:defRPr sz="164">
+              <a:defRPr sz="250">
                 <a:solidFill>
                   <a:schemeClr val="tx1">
                     <a:tint val="82000"/>
@@ -2976,8 +2976,8 @@
         </p:nvSpPr>
         <p:spPr>
           <a:xfrm>
-            <a:off x="1347649" y="868112"/>
-            <a:ext cx="429339" cy="49867"/>
+            <a:off x="1347649" y="1734755"/>
+            <a:ext cx="429339" cy="99649"/>
           </a:xfrm>
           <a:prstGeom prst="rect">
             <a:avLst/>
@@ -2987,7 +2987,7 @@
           <a:bodyPr vert="horz" lIns="91440" tIns="45720" rIns="91440" bIns="45720" rtlCol="0" anchor="ctr"/>
           <a:lstStyle>
             <a:lvl1pPr algn="r">
-              <a:defRPr sz="164">
+              <a:defRPr sz="250">
                 <a:solidFill>
                   <a:schemeClr val="tx1">
                     <a:tint val="82000"/>
@@ -3008,27 +3008,27 @@
     </p:spTree>
     <p:extLst>
       <p:ext uri="{BB962C8B-B14F-4D97-AF65-F5344CB8AC3E}">
-        <p14:creationId xmlns:p14="http://schemas.microsoft.com/office/powerpoint/2010/main" val="1327297469"/>
+        <p14:creationId xmlns:p14="http://schemas.microsoft.com/office/powerpoint/2010/main" val="2770563703"/>
       </p:ext>
     </p:extLst>
   </p:cSld>
   <p:clrMap bg1="lt1" tx1="dk1" bg2="lt2" tx2="dk2" accent1="accent1" accent2="accent2" accent3="accent3" accent4="accent4" accent5="accent5" accent6="accent6" hlink="hlink" folHlink="folHlink"/>
   <p:sldLayoutIdLst>
-    <p:sldLayoutId id="2147483817" r:id="rId1"/>
-    <p:sldLayoutId id="2147483818" r:id="rId2"/>
-    <p:sldLayoutId id="2147483819" r:id="rId3"/>
-    <p:sldLayoutId id="2147483820" r:id="rId4"/>
-    <p:sldLayoutId id="2147483821" r:id="rId5"/>
-    <p:sldLayoutId id="2147483822" r:id="rId6"/>
-    <p:sldLayoutId id="2147483823" r:id="rId7"/>
-    <p:sldLayoutId id="2147483824" r:id="rId8"/>
-    <p:sldLayoutId id="2147483825" r:id="rId9"/>
-    <p:sldLayoutId id="2147483826" r:id="rId10"/>
-    <p:sldLayoutId id="2147483827" r:id="rId11"/>
+    <p:sldLayoutId id="2147483829" r:id="rId1"/>
+    <p:sldLayoutId id="2147483830" r:id="rId2"/>
+    <p:sldLayoutId id="2147483831" r:id="rId3"/>
+    <p:sldLayoutId id="2147483832" r:id="rId4"/>
+    <p:sldLayoutId id="2147483833" r:id="rId5"/>
+    <p:sldLayoutId id="2147483834" r:id="rId6"/>
+    <p:sldLayoutId id="2147483835" r:id="rId7"/>
+    <p:sldLayoutId id="2147483836" r:id="rId8"/>
+    <p:sldLayoutId id="2147483837" r:id="rId9"/>
+    <p:sldLayoutId id="2147483838" r:id="rId10"/>
+    <p:sldLayoutId id="2147483839" r:id="rId11"/>
   </p:sldLayoutIdLst>
   <p:txStyles>
     <p:titleStyle>
-      <a:lvl1pPr algn="l" defTabSz="124907" rtl="0" eaLnBrk="1" latinLnBrk="0" hangingPunct="1">
+      <a:lvl1pPr algn="l" defTabSz="190835" rtl="0" eaLnBrk="1" latinLnBrk="0" hangingPunct="1">
         <a:lnSpc>
           <a:spcPct val="90000"/>
         </a:lnSpc>
@@ -3036,7 +3036,7 @@
           <a:spcPct val="0"/>
         </a:spcBef>
         <a:buNone/>
-        <a:defRPr sz="601" kern="1200">
+        <a:defRPr sz="918" kern="1200">
           <a:solidFill>
             <a:schemeClr val="tx1"/>
           </a:solidFill>
@@ -3047,16 +3047,16 @@
       </a:lvl1pPr>
     </p:titleStyle>
     <p:bodyStyle>
-      <a:lvl1pPr marL="31227" indent="-31227" algn="l" defTabSz="124907" rtl="0" eaLnBrk="1" latinLnBrk="0" hangingPunct="1">
+      <a:lvl1pPr marL="47709" indent="-47709" algn="l" defTabSz="190835" rtl="0" eaLnBrk="1" latinLnBrk="0" hangingPunct="1">
         <a:lnSpc>
           <a:spcPct val="90000"/>
         </a:lnSpc>
         <a:spcBef>
-          <a:spcPts val="137"/>
+          <a:spcPts val="209"/>
         </a:spcBef>
         <a:buFont typeface="Arial" panose="020B0604020202020204" pitchFamily="34" charset="0"/>
         <a:buChar char="•"/>
-        <a:defRPr sz="382" kern="1200">
+        <a:defRPr sz="584" kern="1200">
           <a:solidFill>
             <a:schemeClr val="tx1"/>
           </a:solidFill>
@@ -3065,16 +3065,16 @@
           <a:cs typeface="+mn-cs"/>
         </a:defRPr>
       </a:lvl1pPr>
-      <a:lvl2pPr marL="93680" indent="-31227" algn="l" defTabSz="124907" rtl="0" eaLnBrk="1" latinLnBrk="0" hangingPunct="1">
+      <a:lvl2pPr marL="143126" indent="-47709" algn="l" defTabSz="190835" rtl="0" eaLnBrk="1" latinLnBrk="0" hangingPunct="1">
         <a:lnSpc>
           <a:spcPct val="90000"/>
         </a:lnSpc>
         <a:spcBef>
-          <a:spcPts val="68"/>
+          <a:spcPts val="104"/>
         </a:spcBef>
         <a:buFont typeface="Arial" panose="020B0604020202020204" pitchFamily="34" charset="0"/>
         <a:buChar char="•"/>
-        <a:defRPr sz="328" kern="1200">
+        <a:defRPr sz="501" kern="1200">
           <a:solidFill>
             <a:schemeClr val="tx1"/>
           </a:solidFill>
@@ -3083,16 +3083,16 @@
           <a:cs typeface="+mn-cs"/>
         </a:defRPr>
       </a:lvl2pPr>
-      <a:lvl3pPr marL="156134" indent="-31227" algn="l" defTabSz="124907" rtl="0" eaLnBrk="1" latinLnBrk="0" hangingPunct="1">
+      <a:lvl3pPr marL="238544" indent="-47709" algn="l" defTabSz="190835" rtl="0" eaLnBrk="1" latinLnBrk="0" hangingPunct="1">
         <a:lnSpc>
           <a:spcPct val="90000"/>
         </a:lnSpc>
         <a:spcBef>
-          <a:spcPts val="68"/>
+          <a:spcPts val="104"/>
         </a:spcBef>
         <a:buFont typeface="Arial" panose="020B0604020202020204" pitchFamily="34" charset="0"/>
         <a:buChar char="•"/>
-        <a:defRPr sz="273" kern="1200">
+        <a:defRPr sz="417" kern="1200">
           <a:solidFill>
             <a:schemeClr val="tx1"/>
           </a:solidFill>
@@ -3101,16 +3101,16 @@
           <a:cs typeface="+mn-cs"/>
         </a:defRPr>
       </a:lvl3pPr>
-      <a:lvl4pPr marL="218587" indent="-31227" algn="l" defTabSz="124907" rtl="0" eaLnBrk="1" latinLnBrk="0" hangingPunct="1">
+      <a:lvl4pPr marL="333962" indent="-47709" algn="l" defTabSz="190835" rtl="0" eaLnBrk="1" latinLnBrk="0" hangingPunct="1">
         <a:lnSpc>
           <a:spcPct val="90000"/>
         </a:lnSpc>
         <a:spcBef>
-          <a:spcPts val="68"/>
+          <a:spcPts val="104"/>
         </a:spcBef>
         <a:buFont typeface="Arial" panose="020B0604020202020204" pitchFamily="34" charset="0"/>
         <a:buChar char="•"/>
-        <a:defRPr sz="246" kern="1200">
+        <a:defRPr sz="376" kern="1200">
           <a:solidFill>
             <a:schemeClr val="tx1"/>
           </a:solidFill>
@@ -3119,16 +3119,16 @@
           <a:cs typeface="+mn-cs"/>
         </a:defRPr>
       </a:lvl4pPr>
-      <a:lvl5pPr marL="281041" indent="-31227" algn="l" defTabSz="124907" rtl="0" eaLnBrk="1" latinLnBrk="0" hangingPunct="1">
+      <a:lvl5pPr marL="429379" indent="-47709" algn="l" defTabSz="190835" rtl="0" eaLnBrk="1" latinLnBrk="0" hangingPunct="1">
         <a:lnSpc>
           <a:spcPct val="90000"/>
         </a:lnSpc>
         <a:spcBef>
-          <a:spcPts val="68"/>
+          <a:spcPts val="104"/>
         </a:spcBef>
         <a:buFont typeface="Arial" panose="020B0604020202020204" pitchFamily="34" charset="0"/>
         <a:buChar char="•"/>
-        <a:defRPr sz="246" kern="1200">
+        <a:defRPr sz="376" kern="1200">
           <a:solidFill>
             <a:schemeClr val="tx1"/>
           </a:solidFill>
@@ -3137,16 +3137,16 @@
           <a:cs typeface="+mn-cs"/>
         </a:defRPr>
       </a:lvl5pPr>
-      <a:lvl6pPr marL="343494" indent="-31227" algn="l" defTabSz="124907" rtl="0" eaLnBrk="1" latinLnBrk="0" hangingPunct="1">
+      <a:lvl6pPr marL="524797" indent="-47709" algn="l" defTabSz="190835" rtl="0" eaLnBrk="1" latinLnBrk="0" hangingPunct="1">
         <a:lnSpc>
           <a:spcPct val="90000"/>
         </a:lnSpc>
         <a:spcBef>
-          <a:spcPts val="68"/>
+          <a:spcPts val="104"/>
         </a:spcBef>
         <a:buFont typeface="Arial" panose="020B0604020202020204" pitchFamily="34" charset="0"/>
         <a:buChar char="•"/>
-        <a:defRPr sz="246" kern="1200">
+        <a:defRPr sz="376" kern="1200">
           <a:solidFill>
             <a:schemeClr val="tx1"/>
           </a:solidFill>
@@ -3155,16 +3155,16 @@
           <a:cs typeface="+mn-cs"/>
         </a:defRPr>
       </a:lvl6pPr>
-      <a:lvl7pPr marL="405948" indent="-31227" algn="l" defTabSz="124907" rtl="0" eaLnBrk="1" latinLnBrk="0" hangingPunct="1">
+      <a:lvl7pPr marL="620215" indent="-47709" algn="l" defTabSz="190835" rtl="0" eaLnBrk="1" latinLnBrk="0" hangingPunct="1">
         <a:lnSpc>
           <a:spcPct val="90000"/>
         </a:lnSpc>
         <a:spcBef>
-          <a:spcPts val="68"/>
+          <a:spcPts val="104"/>
         </a:spcBef>
         <a:buFont typeface="Arial" panose="020B0604020202020204" pitchFamily="34" charset="0"/>
         <a:buChar char="•"/>
-        <a:defRPr sz="246" kern="1200">
+        <a:defRPr sz="376" kern="1200">
           <a:solidFill>
             <a:schemeClr val="tx1"/>
           </a:solidFill>
@@ -3173,16 +3173,16 @@
           <a:cs typeface="+mn-cs"/>
         </a:defRPr>
       </a:lvl7pPr>
-      <a:lvl8pPr marL="468401" indent="-31227" algn="l" defTabSz="124907" rtl="0" eaLnBrk="1" latinLnBrk="0" hangingPunct="1">
+      <a:lvl8pPr marL="715632" indent="-47709" algn="l" defTabSz="190835" rtl="0" eaLnBrk="1" latinLnBrk="0" hangingPunct="1">
         <a:lnSpc>
           <a:spcPct val="90000"/>
         </a:lnSpc>
         <a:spcBef>
-          <a:spcPts val="68"/>
+          <a:spcPts val="104"/>
         </a:spcBef>
         <a:buFont typeface="Arial" panose="020B0604020202020204" pitchFamily="34" charset="0"/>
         <a:buChar char="•"/>
-        <a:defRPr sz="246" kern="1200">
+        <a:defRPr sz="376" kern="1200">
           <a:solidFill>
             <a:schemeClr val="tx1"/>
           </a:solidFill>
@@ -3191,16 +3191,16 @@
           <a:cs typeface="+mn-cs"/>
         </a:defRPr>
       </a:lvl8pPr>
-      <a:lvl9pPr marL="530855" indent="-31227" algn="l" defTabSz="124907" rtl="0" eaLnBrk="1" latinLnBrk="0" hangingPunct="1">
+      <a:lvl9pPr marL="811050" indent="-47709" algn="l" defTabSz="190835" rtl="0" eaLnBrk="1" latinLnBrk="0" hangingPunct="1">
         <a:lnSpc>
           <a:spcPct val="90000"/>
         </a:lnSpc>
         <a:spcBef>
-          <a:spcPts val="68"/>
+          <a:spcPts val="104"/>
         </a:spcBef>
         <a:buFont typeface="Arial" panose="020B0604020202020204" pitchFamily="34" charset="0"/>
         <a:buChar char="•"/>
-        <a:defRPr sz="246" kern="1200">
+        <a:defRPr sz="376" kern="1200">
           <a:solidFill>
             <a:schemeClr val="tx1"/>
           </a:solidFill>
@@ -3214,8 +3214,8 @@
       <a:defPPr>
         <a:defRPr lang="en-US"/>
       </a:defPPr>
-      <a:lvl1pPr marL="0" algn="l" defTabSz="124907" rtl="0" eaLnBrk="1" latinLnBrk="0" hangingPunct="1">
-        <a:defRPr sz="246" kern="1200">
+      <a:lvl1pPr marL="0" algn="l" defTabSz="190835" rtl="0" eaLnBrk="1" latinLnBrk="0" hangingPunct="1">
+        <a:defRPr sz="376" kern="1200">
           <a:solidFill>
             <a:schemeClr val="tx1"/>
           </a:solidFill>
@@ -3224,8 +3224,8 @@
           <a:cs typeface="+mn-cs"/>
         </a:defRPr>
       </a:lvl1pPr>
-      <a:lvl2pPr marL="62454" algn="l" defTabSz="124907" rtl="0" eaLnBrk="1" latinLnBrk="0" hangingPunct="1">
-        <a:defRPr sz="246" kern="1200">
+      <a:lvl2pPr marL="95418" algn="l" defTabSz="190835" rtl="0" eaLnBrk="1" latinLnBrk="0" hangingPunct="1">
+        <a:defRPr sz="376" kern="1200">
           <a:solidFill>
             <a:schemeClr val="tx1"/>
           </a:solidFill>
@@ -3234,8 +3234,8 @@
           <a:cs typeface="+mn-cs"/>
         </a:defRPr>
       </a:lvl2pPr>
-      <a:lvl3pPr marL="124907" algn="l" defTabSz="124907" rtl="0" eaLnBrk="1" latinLnBrk="0" hangingPunct="1">
-        <a:defRPr sz="246" kern="1200">
+      <a:lvl3pPr marL="190835" algn="l" defTabSz="190835" rtl="0" eaLnBrk="1" latinLnBrk="0" hangingPunct="1">
+        <a:defRPr sz="376" kern="1200">
           <a:solidFill>
             <a:schemeClr val="tx1"/>
           </a:solidFill>
@@ -3244,8 +3244,8 @@
           <a:cs typeface="+mn-cs"/>
         </a:defRPr>
       </a:lvl3pPr>
-      <a:lvl4pPr marL="187361" algn="l" defTabSz="124907" rtl="0" eaLnBrk="1" latinLnBrk="0" hangingPunct="1">
-        <a:defRPr sz="246" kern="1200">
+      <a:lvl4pPr marL="286253" algn="l" defTabSz="190835" rtl="0" eaLnBrk="1" latinLnBrk="0" hangingPunct="1">
+        <a:defRPr sz="376" kern="1200">
           <a:solidFill>
             <a:schemeClr val="tx1"/>
           </a:solidFill>
@@ -3254,8 +3254,8 @@
           <a:cs typeface="+mn-cs"/>
         </a:defRPr>
       </a:lvl4pPr>
-      <a:lvl5pPr marL="249814" algn="l" defTabSz="124907" rtl="0" eaLnBrk="1" latinLnBrk="0" hangingPunct="1">
-        <a:defRPr sz="246" kern="1200">
+      <a:lvl5pPr marL="381671" algn="l" defTabSz="190835" rtl="0" eaLnBrk="1" latinLnBrk="0" hangingPunct="1">
+        <a:defRPr sz="376" kern="1200">
           <a:solidFill>
             <a:schemeClr val="tx1"/>
           </a:solidFill>
@@ -3264,8 +3264,8 @@
           <a:cs typeface="+mn-cs"/>
         </a:defRPr>
       </a:lvl5pPr>
-      <a:lvl6pPr marL="312268" algn="l" defTabSz="124907" rtl="0" eaLnBrk="1" latinLnBrk="0" hangingPunct="1">
-        <a:defRPr sz="246" kern="1200">
+      <a:lvl6pPr marL="477088" algn="l" defTabSz="190835" rtl="0" eaLnBrk="1" latinLnBrk="0" hangingPunct="1">
+        <a:defRPr sz="376" kern="1200">
           <a:solidFill>
             <a:schemeClr val="tx1"/>
           </a:solidFill>
@@ -3274,8 +3274,8 @@
           <a:cs typeface="+mn-cs"/>
         </a:defRPr>
       </a:lvl6pPr>
-      <a:lvl7pPr marL="374721" algn="l" defTabSz="124907" rtl="0" eaLnBrk="1" latinLnBrk="0" hangingPunct="1">
-        <a:defRPr sz="246" kern="1200">
+      <a:lvl7pPr marL="572506" algn="l" defTabSz="190835" rtl="0" eaLnBrk="1" latinLnBrk="0" hangingPunct="1">
+        <a:defRPr sz="376" kern="1200">
           <a:solidFill>
             <a:schemeClr val="tx1"/>
           </a:solidFill>
@@ -3284,8 +3284,8 @@
           <a:cs typeface="+mn-cs"/>
         </a:defRPr>
       </a:lvl7pPr>
-      <a:lvl8pPr marL="437175" algn="l" defTabSz="124907" rtl="0" eaLnBrk="1" latinLnBrk="0" hangingPunct="1">
-        <a:defRPr sz="246" kern="1200">
+      <a:lvl8pPr marL="667923" algn="l" defTabSz="190835" rtl="0" eaLnBrk="1" latinLnBrk="0" hangingPunct="1">
+        <a:defRPr sz="376" kern="1200">
           <a:solidFill>
             <a:schemeClr val="tx1"/>
           </a:solidFill>
@@ -3294,8 +3294,8 @@
           <a:cs typeface="+mn-cs"/>
         </a:defRPr>
       </a:lvl8pPr>
-      <a:lvl9pPr marL="499628" algn="l" defTabSz="124907" rtl="0" eaLnBrk="1" latinLnBrk="0" hangingPunct="1">
-        <a:defRPr sz="246" kern="1200">
+      <a:lvl9pPr marL="763341" algn="l" defTabSz="190835" rtl="0" eaLnBrk="1" latinLnBrk="0" hangingPunct="1">
+        <a:defRPr sz="376" kern="1200">
           <a:solidFill>
             <a:schemeClr val="tx1"/>
           </a:solidFill>
@@ -3328,10 +3328,10 @@
       </p:grpSpPr>
       <p:pic>
         <p:nvPicPr>
-          <p:cNvPr id="38" name="Picture 37">
+          <p:cNvPr id="18" name="Picture 17">
             <a:extLst>
               <a:ext uri="{FF2B5EF4-FFF2-40B4-BE49-F238E27FC236}">
-                <a16:creationId xmlns:a16="http://schemas.microsoft.com/office/drawing/2014/main" id="{E236ECD3-4ECA-2667-32C9-76FF03ECE76D}"/>
+                <a16:creationId xmlns:a16="http://schemas.microsoft.com/office/drawing/2014/main" id="{14AD5565-DCF0-ED7C-8A1E-047BC5869F78}"/>
               </a:ext>
             </a:extLst>
           </p:cNvPr>
@@ -3348,7 +3348,7 @@
         </p:blipFill>
         <p:spPr>
           <a:xfrm>
-            <a:off x="950911" y="-2369"/>
+            <a:off x="6350" y="0"/>
             <a:ext cx="936625" cy="936625"/>
           </a:xfrm>
           <a:prstGeom prst="rect">
@@ -3358,10 +3358,10 @@
       </p:pic>
       <p:pic>
         <p:nvPicPr>
-          <p:cNvPr id="39" name="Picture 38">
+          <p:cNvPr id="19" name="Picture 18">
             <a:extLst>
               <a:ext uri="{FF2B5EF4-FFF2-40B4-BE49-F238E27FC236}">
-                <a16:creationId xmlns:a16="http://schemas.microsoft.com/office/drawing/2014/main" id="{19FFFAE8-00A4-730A-F942-5E251425DC27}"/>
+                <a16:creationId xmlns:a16="http://schemas.microsoft.com/office/drawing/2014/main" id="{FA30EAF7-0136-81BD-F2D6-E82A5768189C}"/>
               </a:ext>
             </a:extLst>
           </p:cNvPr>
@@ -3378,8 +3378,8 @@
         </p:blipFill>
         <p:spPr>
           <a:xfrm>
-            <a:off x="24593" y="22225"/>
-            <a:ext cx="912032" cy="912032"/>
+            <a:off x="956468" y="3578"/>
+            <a:ext cx="936625" cy="936625"/>
           </a:xfrm>
           <a:prstGeom prst="rect">
             <a:avLst/>
@@ -3388,10 +3388,10 @@
       </p:pic>
       <p:sp>
         <p:nvSpPr>
-          <p:cNvPr id="40" name="TextBox 39">
+          <p:cNvPr id="20" name="TextBox 19">
             <a:extLst>
               <a:ext uri="{FF2B5EF4-FFF2-40B4-BE49-F238E27FC236}">
-                <a16:creationId xmlns:a16="http://schemas.microsoft.com/office/drawing/2014/main" id="{4A9EC968-5B97-BDE7-3F00-7A5EA4293BC9}"/>
+                <a16:creationId xmlns:a16="http://schemas.microsoft.com/office/drawing/2014/main" id="{2256FB09-1372-0431-0009-0BB802DC3F87}"/>
               </a:ext>
             </a:extLst>
           </p:cNvPr>
@@ -3423,10 +3423,10 @@
       </p:sp>
       <p:sp>
         <p:nvSpPr>
-          <p:cNvPr id="41" name="TextBox 40">
+          <p:cNvPr id="21" name="TextBox 20">
             <a:extLst>
               <a:ext uri="{FF2B5EF4-FFF2-40B4-BE49-F238E27FC236}">
-                <a16:creationId xmlns:a16="http://schemas.microsoft.com/office/drawing/2014/main" id="{1DEF05D3-9B92-5B28-AC28-25167727520D}"/>
+                <a16:creationId xmlns:a16="http://schemas.microsoft.com/office/drawing/2014/main" id="{245C0F58-28FA-2F01-091D-9B0CEA763EDB}"/>
               </a:ext>
             </a:extLst>
           </p:cNvPr>
@@ -3452,6 +3452,136 @@
             <a:r>
               <a:rPr lang="en-DE" sz="600" b="1" dirty="0"/>
               <a:t>B</a:t>
+            </a:r>
+          </a:p>
+        </p:txBody>
+      </p:sp>
+      <p:pic>
+        <p:nvPicPr>
+          <p:cNvPr id="22" name="Picture 21">
+            <a:extLst>
+              <a:ext uri="{FF2B5EF4-FFF2-40B4-BE49-F238E27FC236}">
+                <a16:creationId xmlns:a16="http://schemas.microsoft.com/office/drawing/2014/main" id="{DFAE98C2-01A2-F8E4-C084-5821EA2BE048}"/>
+              </a:ext>
+            </a:extLst>
+          </p:cNvPr>
+          <p:cNvPicPr>
+            <a:picLocks noChangeAspect="1"/>
+          </p:cNvPicPr>
+          <p:nvPr/>
+        </p:nvPicPr>
+        <p:blipFill>
+          <a:blip r:embed="rId4"/>
+          <a:stretch>
+            <a:fillRect/>
+          </a:stretch>
+        </p:blipFill>
+        <p:spPr>
+          <a:xfrm>
+            <a:off x="965200" y="936625"/>
+            <a:ext cx="936625" cy="936625"/>
+          </a:xfrm>
+          <a:prstGeom prst="rect">
+            <a:avLst/>
+          </a:prstGeom>
+        </p:spPr>
+      </p:pic>
+      <p:pic>
+        <p:nvPicPr>
+          <p:cNvPr id="23" name="Picture 22">
+            <a:extLst>
+              <a:ext uri="{FF2B5EF4-FFF2-40B4-BE49-F238E27FC236}">
+                <a16:creationId xmlns:a16="http://schemas.microsoft.com/office/drawing/2014/main" id="{B6D38640-E670-E06D-E24B-512880D11F6A}"/>
+              </a:ext>
+            </a:extLst>
+          </p:cNvPr>
+          <p:cNvPicPr>
+            <a:picLocks noChangeAspect="1"/>
+          </p:cNvPicPr>
+          <p:nvPr/>
+        </p:nvPicPr>
+        <p:blipFill>
+          <a:blip r:embed="rId5"/>
+          <a:stretch>
+            <a:fillRect/>
+          </a:stretch>
+        </p:blipFill>
+        <p:spPr>
+          <a:xfrm>
+            <a:off x="6350" y="936624"/>
+            <a:ext cx="936625" cy="936625"/>
+          </a:xfrm>
+          <a:prstGeom prst="rect">
+            <a:avLst/>
+          </a:prstGeom>
+        </p:spPr>
+      </p:pic>
+      <p:sp>
+        <p:nvSpPr>
+          <p:cNvPr id="24" name="TextBox 23">
+            <a:extLst>
+              <a:ext uri="{FF2B5EF4-FFF2-40B4-BE49-F238E27FC236}">
+                <a16:creationId xmlns:a16="http://schemas.microsoft.com/office/drawing/2014/main" id="{F5AADD2C-08C3-0796-DE27-442D147A308E}"/>
+              </a:ext>
+            </a:extLst>
+          </p:cNvPr>
+          <p:cNvSpPr txBox="1"/>
+          <p:nvPr/>
+        </p:nvSpPr>
+        <p:spPr>
+          <a:xfrm>
+            <a:off x="-61723" y="885567"/>
+            <a:ext cx="171450" cy="184666"/>
+          </a:xfrm>
+          <a:prstGeom prst="rect">
+            <a:avLst/>
+          </a:prstGeom>
+          <a:noFill/>
+        </p:spPr>
+        <p:txBody>
+          <a:bodyPr wrap="square" rtlCol="0">
+            <a:spAutoFit/>
+          </a:bodyPr>
+          <a:lstStyle/>
+          <a:p>
+            <a:r>
+              <a:rPr lang="en-DE" sz="600" b="1" dirty="0"/>
+              <a:t>C</a:t>
+            </a:r>
+          </a:p>
+        </p:txBody>
+      </p:sp>
+      <p:sp>
+        <p:nvSpPr>
+          <p:cNvPr id="25" name="TextBox 24">
+            <a:extLst>
+              <a:ext uri="{FF2B5EF4-FFF2-40B4-BE49-F238E27FC236}">
+                <a16:creationId xmlns:a16="http://schemas.microsoft.com/office/drawing/2014/main" id="{E980D72A-F029-CE8F-7E0A-264012562BC0}"/>
+              </a:ext>
+            </a:extLst>
+          </p:cNvPr>
+          <p:cNvSpPr txBox="1"/>
+          <p:nvPr/>
+        </p:nvSpPr>
+        <p:spPr>
+          <a:xfrm>
+            <a:off x="880268" y="885567"/>
+            <a:ext cx="171450" cy="184666"/>
+          </a:xfrm>
+          <a:prstGeom prst="rect">
+            <a:avLst/>
+          </a:prstGeom>
+          <a:noFill/>
+        </p:spPr>
+        <p:txBody>
+          <a:bodyPr wrap="square" rtlCol="0">
+            <a:spAutoFit/>
+          </a:bodyPr>
+          <a:lstStyle/>
+          <a:p>
+            <a:r>
+              <a:rPr lang="en-DE" sz="600" b="1" dirty="0"/>
+              <a:t>D</a:t>
             </a:r>
           </a:p>
         </p:txBody>

--- a/Supp Data/Fig S14.pptx
+++ b/Supp Data/Fig S14.pptx
@@ -2,7 +2,7 @@
 <file path=ppt/presentation.xml><?xml version="1.0" encoding="utf-8"?>
 <p:presentation xmlns:a="http://schemas.openxmlformats.org/drawingml/2006/main" xmlns:r="http://schemas.openxmlformats.org/officeDocument/2006/relationships" xmlns:p="http://schemas.openxmlformats.org/presentationml/2006/main" saveSubsetFonts="1" autoCompressPictures="0">
   <p:sldMasterIdLst>
-    <p:sldMasterId id="2147483828" r:id="rId1"/>
+    <p:sldMasterId id="2147483864" r:id="rId1"/>
   </p:sldMasterIdLst>
   <p:notesMasterIdLst>
     <p:notesMasterId r:id="rId3"/>
@@ -10,7 +10,7 @@
   <p:sldIdLst>
     <p:sldId id="281" r:id="rId2"/>
   </p:sldIdLst>
-  <p:sldSz cx="1908175" cy="1871663"/>
+  <p:sldSz cx="1908175" cy="2519363"/>
   <p:notesSz cx="6858000" cy="9144000"/>
   <p:defaultTextStyle>
     <a:defPPr>
@@ -197,7 +197,7 @@
           <a:p>
             <a:fld id="{810CFC23-F338-EB41-8653-4316F1EF48B5}" type="datetimeFigureOut">
               <a:rPr lang="en-DE" smtClean="0"/>
-              <a:t>20.05.26</a:t>
+              <a:t>29.05.26</a:t>
             </a:fld>
             <a:endParaRPr lang="en-DE"/>
           </a:p>
@@ -215,8 +215,8 @@
         </p:nvSpPr>
         <p:spPr>
           <a:xfrm>
-            <a:off x="1855788" y="1143000"/>
-            <a:ext cx="3146425" cy="3086100"/>
+            <a:off x="2260600" y="1143000"/>
+            <a:ext cx="2336800" cy="3086100"/>
           </a:xfrm>
           <a:prstGeom prst="rect">
             <a:avLst/>
@@ -494,8 +494,8 @@
         </p:nvSpPr>
         <p:spPr>
           <a:xfrm>
-            <a:off x="143113" y="306312"/>
-            <a:ext cx="1621949" cy="651616"/>
+            <a:off x="143113" y="412312"/>
+            <a:ext cx="1621949" cy="877112"/>
           </a:xfrm>
         </p:spPr>
         <p:txBody>
@@ -526,8 +526,8 @@
         </p:nvSpPr>
         <p:spPr>
           <a:xfrm>
-            <a:off x="238522" y="983057"/>
-            <a:ext cx="1431131" cy="451885"/>
+            <a:off x="238522" y="1323249"/>
+            <a:ext cx="1431131" cy="608263"/>
           </a:xfrm>
         </p:spPr>
         <p:txBody>
@@ -596,7 +596,7 @@
           <a:p>
             <a:fld id="{CF9FBDB8-36C6-4744-999D-C99C2C96D370}" type="datetimeFigureOut">
               <a:rPr lang="en-DE" smtClean="0"/>
-              <a:t>20.05.26</a:t>
+              <a:t>29.05.26</a:t>
             </a:fld>
             <a:endParaRPr lang="en-DE"/>
           </a:p>
@@ -647,7 +647,7 @@
     </p:spTree>
     <p:extLst>
       <p:ext uri="{BB962C8B-B14F-4D97-AF65-F5344CB8AC3E}">
-        <p14:creationId xmlns:p14="http://schemas.microsoft.com/office/powerpoint/2010/main" val="3169246803"/>
+        <p14:creationId xmlns:p14="http://schemas.microsoft.com/office/powerpoint/2010/main" val="3118332484"/>
       </p:ext>
     </p:extLst>
   </p:cSld>
@@ -766,7 +766,7 @@
           <a:p>
             <a:fld id="{CF9FBDB8-36C6-4744-999D-C99C2C96D370}" type="datetimeFigureOut">
               <a:rPr lang="en-DE" smtClean="0"/>
-              <a:t>20.05.26</a:t>
+              <a:t>29.05.26</a:t>
             </a:fld>
             <a:endParaRPr lang="en-DE"/>
           </a:p>
@@ -817,7 +817,7 @@
     </p:spTree>
     <p:extLst>
       <p:ext uri="{BB962C8B-B14F-4D97-AF65-F5344CB8AC3E}">
-        <p14:creationId xmlns:p14="http://schemas.microsoft.com/office/powerpoint/2010/main" val="2851412103"/>
+        <p14:creationId xmlns:p14="http://schemas.microsoft.com/office/powerpoint/2010/main" val="3059153286"/>
       </p:ext>
     </p:extLst>
   </p:cSld>
@@ -856,8 +856,8 @@
         </p:nvSpPr>
         <p:spPr>
           <a:xfrm>
-            <a:off x="1365538" y="99649"/>
-            <a:ext cx="411450" cy="1586148"/>
+            <a:off x="1365538" y="134133"/>
+            <a:ext cx="411450" cy="2135044"/>
           </a:xfrm>
         </p:spPr>
         <p:txBody>
@@ -884,8 +884,8 @@
         </p:nvSpPr>
         <p:spPr>
           <a:xfrm>
-            <a:off x="131187" y="99649"/>
-            <a:ext cx="1210499" cy="1586148"/>
+            <a:off x="131187" y="134133"/>
+            <a:ext cx="1210499" cy="2135044"/>
           </a:xfrm>
         </p:spPr>
         <p:txBody>
@@ -946,7 +946,7 @@
           <a:p>
             <a:fld id="{CF9FBDB8-36C6-4744-999D-C99C2C96D370}" type="datetimeFigureOut">
               <a:rPr lang="en-DE" smtClean="0"/>
-              <a:t>20.05.26</a:t>
+              <a:t>29.05.26</a:t>
             </a:fld>
             <a:endParaRPr lang="en-DE"/>
           </a:p>
@@ -997,7 +997,7 @@
     </p:spTree>
     <p:extLst>
       <p:ext uri="{BB962C8B-B14F-4D97-AF65-F5344CB8AC3E}">
-        <p14:creationId xmlns:p14="http://schemas.microsoft.com/office/powerpoint/2010/main" val="1822407258"/>
+        <p14:creationId xmlns:p14="http://schemas.microsoft.com/office/powerpoint/2010/main" val="4139875541"/>
       </p:ext>
     </p:extLst>
   </p:cSld>
@@ -1116,7 +1116,7 @@
           <a:p>
             <a:fld id="{CF9FBDB8-36C6-4744-999D-C99C2C96D370}" type="datetimeFigureOut">
               <a:rPr lang="en-DE" smtClean="0"/>
-              <a:t>20.05.26</a:t>
+              <a:t>29.05.26</a:t>
             </a:fld>
             <a:endParaRPr lang="en-DE"/>
           </a:p>
@@ -1167,7 +1167,7 @@
     </p:spTree>
     <p:extLst>
       <p:ext uri="{BB962C8B-B14F-4D97-AF65-F5344CB8AC3E}">
-        <p14:creationId xmlns:p14="http://schemas.microsoft.com/office/powerpoint/2010/main" val="533391445"/>
+        <p14:creationId xmlns:p14="http://schemas.microsoft.com/office/powerpoint/2010/main" val="130570458"/>
       </p:ext>
     </p:extLst>
   </p:cSld>
@@ -1206,8 +1206,8 @@
         </p:nvSpPr>
         <p:spPr>
           <a:xfrm>
-            <a:off x="130193" y="466616"/>
-            <a:ext cx="1645801" cy="778560"/>
+            <a:off x="130193" y="628092"/>
+            <a:ext cx="1645801" cy="1047985"/>
           </a:xfrm>
         </p:spPr>
         <p:txBody>
@@ -1238,8 +1238,8 @@
         </p:nvSpPr>
         <p:spPr>
           <a:xfrm>
-            <a:off x="130193" y="1252542"/>
-            <a:ext cx="1645801" cy="409426"/>
+            <a:off x="130193" y="1685991"/>
+            <a:ext cx="1645801" cy="551110"/>
           </a:xfrm>
         </p:spPr>
         <p:txBody>
@@ -1362,7 +1362,7 @@
           <a:p>
             <a:fld id="{CF9FBDB8-36C6-4744-999D-C99C2C96D370}" type="datetimeFigureOut">
               <a:rPr lang="en-DE" smtClean="0"/>
-              <a:t>20.05.26</a:t>
+              <a:t>29.05.26</a:t>
             </a:fld>
             <a:endParaRPr lang="en-DE"/>
           </a:p>
@@ -1413,7 +1413,7 @@
     </p:spTree>
     <p:extLst>
       <p:ext uri="{BB962C8B-B14F-4D97-AF65-F5344CB8AC3E}">
-        <p14:creationId xmlns:p14="http://schemas.microsoft.com/office/powerpoint/2010/main" val="829573862"/>
+        <p14:creationId xmlns:p14="http://schemas.microsoft.com/office/powerpoint/2010/main" val="2788724929"/>
       </p:ext>
     </p:extLst>
   </p:cSld>
@@ -1475,8 +1475,8 @@
         </p:nvSpPr>
         <p:spPr>
           <a:xfrm>
-            <a:off x="131187" y="498244"/>
-            <a:ext cx="810974" cy="1187553"/>
+            <a:off x="131187" y="670664"/>
+            <a:ext cx="810974" cy="1598513"/>
           </a:xfrm>
         </p:spPr>
         <p:txBody>
@@ -1532,8 +1532,8 @@
         </p:nvSpPr>
         <p:spPr>
           <a:xfrm>
-            <a:off x="966014" y="498244"/>
-            <a:ext cx="810974" cy="1187553"/>
+            <a:off x="966014" y="670664"/>
+            <a:ext cx="810974" cy="1598513"/>
           </a:xfrm>
         </p:spPr>
         <p:txBody>
@@ -1594,7 +1594,7 @@
           <a:p>
             <a:fld id="{CF9FBDB8-36C6-4744-999D-C99C2C96D370}" type="datetimeFigureOut">
               <a:rPr lang="en-DE" smtClean="0"/>
-              <a:t>20.05.26</a:t>
+              <a:t>29.05.26</a:t>
             </a:fld>
             <a:endParaRPr lang="en-DE"/>
           </a:p>
@@ -1645,7 +1645,7 @@
     </p:spTree>
     <p:extLst>
       <p:ext uri="{BB962C8B-B14F-4D97-AF65-F5344CB8AC3E}">
-        <p14:creationId xmlns:p14="http://schemas.microsoft.com/office/powerpoint/2010/main" val="4133595532"/>
+        <p14:creationId xmlns:p14="http://schemas.microsoft.com/office/powerpoint/2010/main" val="1915970101"/>
       </p:ext>
     </p:extLst>
   </p:cSld>
@@ -1684,8 +1684,8 @@
         </p:nvSpPr>
         <p:spPr>
           <a:xfrm>
-            <a:off x="131436" y="99649"/>
-            <a:ext cx="1645801" cy="361768"/>
+            <a:off x="131436" y="134133"/>
+            <a:ext cx="1645801" cy="486960"/>
           </a:xfrm>
         </p:spPr>
         <p:txBody>
@@ -1712,8 +1712,8 @@
         </p:nvSpPr>
         <p:spPr>
           <a:xfrm>
-            <a:off x="131436" y="458818"/>
-            <a:ext cx="807247" cy="224859"/>
+            <a:off x="131436" y="617594"/>
+            <a:ext cx="807247" cy="302673"/>
           </a:xfrm>
         </p:spPr>
         <p:txBody>
@@ -1777,8 +1777,8 @@
         </p:nvSpPr>
         <p:spPr>
           <a:xfrm>
-            <a:off x="131436" y="683677"/>
-            <a:ext cx="807247" cy="1005586"/>
+            <a:off x="131436" y="920267"/>
+            <a:ext cx="807247" cy="1353575"/>
           </a:xfrm>
         </p:spPr>
         <p:txBody>
@@ -1834,8 +1834,8 @@
         </p:nvSpPr>
         <p:spPr>
           <a:xfrm>
-            <a:off x="966014" y="458818"/>
-            <a:ext cx="811223" cy="224859"/>
+            <a:off x="966014" y="617594"/>
+            <a:ext cx="811223" cy="302673"/>
           </a:xfrm>
         </p:spPr>
         <p:txBody>
@@ -1899,8 +1899,8 @@
         </p:nvSpPr>
         <p:spPr>
           <a:xfrm>
-            <a:off x="966014" y="683677"/>
-            <a:ext cx="811223" cy="1005586"/>
+            <a:off x="966014" y="920267"/>
+            <a:ext cx="811223" cy="1353575"/>
           </a:xfrm>
         </p:spPr>
         <p:txBody>
@@ -1961,7 +1961,7 @@
           <a:p>
             <a:fld id="{CF9FBDB8-36C6-4744-999D-C99C2C96D370}" type="datetimeFigureOut">
               <a:rPr lang="en-DE" smtClean="0"/>
-              <a:t>20.05.26</a:t>
+              <a:t>29.05.26</a:t>
             </a:fld>
             <a:endParaRPr lang="en-DE"/>
           </a:p>
@@ -2012,7 +2012,7 @@
     </p:spTree>
     <p:extLst>
       <p:ext uri="{BB962C8B-B14F-4D97-AF65-F5344CB8AC3E}">
-        <p14:creationId xmlns:p14="http://schemas.microsoft.com/office/powerpoint/2010/main" val="2536637699"/>
+        <p14:creationId xmlns:p14="http://schemas.microsoft.com/office/powerpoint/2010/main" val="2707179707"/>
       </p:ext>
     </p:extLst>
   </p:cSld>
@@ -2079,7 +2079,7 @@
           <a:p>
             <a:fld id="{CF9FBDB8-36C6-4744-999D-C99C2C96D370}" type="datetimeFigureOut">
               <a:rPr lang="en-DE" smtClean="0"/>
-              <a:t>20.05.26</a:t>
+              <a:t>29.05.26</a:t>
             </a:fld>
             <a:endParaRPr lang="en-DE"/>
           </a:p>
@@ -2130,7 +2130,7 @@
     </p:spTree>
     <p:extLst>
       <p:ext uri="{BB962C8B-B14F-4D97-AF65-F5344CB8AC3E}">
-        <p14:creationId xmlns:p14="http://schemas.microsoft.com/office/powerpoint/2010/main" val="2082714853"/>
+        <p14:creationId xmlns:p14="http://schemas.microsoft.com/office/powerpoint/2010/main" val="534647792"/>
       </p:ext>
     </p:extLst>
   </p:cSld>
@@ -2174,7 +2174,7 @@
           <a:p>
             <a:fld id="{CF9FBDB8-36C6-4744-999D-C99C2C96D370}" type="datetimeFigureOut">
               <a:rPr lang="en-DE" smtClean="0"/>
-              <a:t>20.05.26</a:t>
+              <a:t>29.05.26</a:t>
             </a:fld>
             <a:endParaRPr lang="en-DE"/>
           </a:p>
@@ -2225,7 +2225,7 @@
     </p:spTree>
     <p:extLst>
       <p:ext uri="{BB962C8B-B14F-4D97-AF65-F5344CB8AC3E}">
-        <p14:creationId xmlns:p14="http://schemas.microsoft.com/office/powerpoint/2010/main" val="807550524"/>
+        <p14:creationId xmlns:p14="http://schemas.microsoft.com/office/powerpoint/2010/main" val="1583634443"/>
       </p:ext>
     </p:extLst>
   </p:cSld>
@@ -2264,8 +2264,8 @@
         </p:nvSpPr>
         <p:spPr>
           <a:xfrm>
-            <a:off x="131436" y="124778"/>
-            <a:ext cx="615436" cy="436721"/>
+            <a:off x="131436" y="167958"/>
+            <a:ext cx="615436" cy="587851"/>
           </a:xfrm>
         </p:spPr>
         <p:txBody>
@@ -2296,8 +2296,8 @@
         </p:nvSpPr>
         <p:spPr>
           <a:xfrm>
-            <a:off x="811223" y="269485"/>
-            <a:ext cx="966014" cy="1330094"/>
+            <a:off x="811223" y="362742"/>
+            <a:ext cx="966014" cy="1790381"/>
           </a:xfrm>
         </p:spPr>
         <p:txBody>
@@ -2381,8 +2381,8 @@
         </p:nvSpPr>
         <p:spPr>
           <a:xfrm>
-            <a:off x="131436" y="561499"/>
-            <a:ext cx="615436" cy="1040246"/>
+            <a:off x="131436" y="755809"/>
+            <a:ext cx="615436" cy="1400229"/>
           </a:xfrm>
         </p:spPr>
         <p:txBody>
@@ -2451,7 +2451,7 @@
           <a:p>
             <a:fld id="{CF9FBDB8-36C6-4744-999D-C99C2C96D370}" type="datetimeFigureOut">
               <a:rPr lang="en-DE" smtClean="0"/>
-              <a:t>20.05.26</a:t>
+              <a:t>29.05.26</a:t>
             </a:fld>
             <a:endParaRPr lang="en-DE"/>
           </a:p>
@@ -2502,7 +2502,7 @@
     </p:spTree>
     <p:extLst>
       <p:ext uri="{BB962C8B-B14F-4D97-AF65-F5344CB8AC3E}">
-        <p14:creationId xmlns:p14="http://schemas.microsoft.com/office/powerpoint/2010/main" val="923758545"/>
+        <p14:creationId xmlns:p14="http://schemas.microsoft.com/office/powerpoint/2010/main" val="2400622507"/>
       </p:ext>
     </p:extLst>
   </p:cSld>
@@ -2541,8 +2541,8 @@
         </p:nvSpPr>
         <p:spPr>
           <a:xfrm>
-            <a:off x="131436" y="124778"/>
-            <a:ext cx="615436" cy="436721"/>
+            <a:off x="131436" y="167958"/>
+            <a:ext cx="615436" cy="587851"/>
           </a:xfrm>
         </p:spPr>
         <p:txBody>
@@ -2573,8 +2573,8 @@
         </p:nvSpPr>
         <p:spPr>
           <a:xfrm>
-            <a:off x="811223" y="269485"/>
-            <a:ext cx="966014" cy="1330094"/>
+            <a:off x="811223" y="362742"/>
+            <a:ext cx="966014" cy="1790381"/>
           </a:xfrm>
         </p:spPr>
         <p:txBody>
@@ -2638,8 +2638,8 @@
         </p:nvSpPr>
         <p:spPr>
           <a:xfrm>
-            <a:off x="131436" y="561499"/>
-            <a:ext cx="615436" cy="1040246"/>
+            <a:off x="131436" y="755809"/>
+            <a:ext cx="615436" cy="1400229"/>
           </a:xfrm>
         </p:spPr>
         <p:txBody>
@@ -2708,7 +2708,7 @@
           <a:p>
             <a:fld id="{CF9FBDB8-36C6-4744-999D-C99C2C96D370}" type="datetimeFigureOut">
               <a:rPr lang="en-DE" smtClean="0"/>
-              <a:t>20.05.26</a:t>
+              <a:t>29.05.26</a:t>
             </a:fld>
             <a:endParaRPr lang="en-DE"/>
           </a:p>
@@ -2759,7 +2759,7 @@
     </p:spTree>
     <p:extLst>
       <p:ext uri="{BB962C8B-B14F-4D97-AF65-F5344CB8AC3E}">
-        <p14:creationId xmlns:p14="http://schemas.microsoft.com/office/powerpoint/2010/main" val="2157888256"/>
+        <p14:creationId xmlns:p14="http://schemas.microsoft.com/office/powerpoint/2010/main" val="854743892"/>
       </p:ext>
     </p:extLst>
   </p:cSld>
@@ -2803,8 +2803,8 @@
         </p:nvSpPr>
         <p:spPr>
           <a:xfrm>
-            <a:off x="131187" y="99649"/>
-            <a:ext cx="1645801" cy="361768"/>
+            <a:off x="131187" y="134133"/>
+            <a:ext cx="1645801" cy="486960"/>
           </a:xfrm>
           <a:prstGeom prst="rect">
             <a:avLst/>
@@ -2836,8 +2836,8 @@
         </p:nvSpPr>
         <p:spPr>
           <a:xfrm>
-            <a:off x="131187" y="498244"/>
-            <a:ext cx="1645801" cy="1187553"/>
+            <a:off x="131187" y="670664"/>
+            <a:ext cx="1645801" cy="1598513"/>
           </a:xfrm>
           <a:prstGeom prst="rect">
             <a:avLst/>
@@ -2898,8 +2898,8 @@
         </p:nvSpPr>
         <p:spPr>
           <a:xfrm>
-            <a:off x="131187" y="1734755"/>
-            <a:ext cx="429339" cy="99649"/>
+            <a:off x="131187" y="2335077"/>
+            <a:ext cx="429339" cy="134133"/>
           </a:xfrm>
           <a:prstGeom prst="rect">
             <a:avLst/>
@@ -2921,7 +2921,7 @@
           <a:p>
             <a:fld id="{CF9FBDB8-36C6-4744-999D-C99C2C96D370}" type="datetimeFigureOut">
               <a:rPr lang="en-DE" smtClean="0"/>
-              <a:t>20.05.26</a:t>
+              <a:t>29.05.26</a:t>
             </a:fld>
             <a:endParaRPr lang="en-DE"/>
           </a:p>
@@ -2939,8 +2939,8 @@
         </p:nvSpPr>
         <p:spPr>
           <a:xfrm>
-            <a:off x="632083" y="1734755"/>
-            <a:ext cx="644009" cy="99649"/>
+            <a:off x="632083" y="2335077"/>
+            <a:ext cx="644009" cy="134133"/>
           </a:xfrm>
           <a:prstGeom prst="rect">
             <a:avLst/>
@@ -2976,8 +2976,8 @@
         </p:nvSpPr>
         <p:spPr>
           <a:xfrm>
-            <a:off x="1347649" y="1734755"/>
-            <a:ext cx="429339" cy="99649"/>
+            <a:off x="1347649" y="2335077"/>
+            <a:ext cx="429339" cy="134133"/>
           </a:xfrm>
           <a:prstGeom prst="rect">
             <a:avLst/>
@@ -3008,23 +3008,23 @@
     </p:spTree>
     <p:extLst>
       <p:ext uri="{BB962C8B-B14F-4D97-AF65-F5344CB8AC3E}">
-        <p14:creationId xmlns:p14="http://schemas.microsoft.com/office/powerpoint/2010/main" val="2770563703"/>
+        <p14:creationId xmlns:p14="http://schemas.microsoft.com/office/powerpoint/2010/main" val="4003953302"/>
       </p:ext>
     </p:extLst>
   </p:cSld>
   <p:clrMap bg1="lt1" tx1="dk1" bg2="lt2" tx2="dk2" accent1="accent1" accent2="accent2" accent3="accent3" accent4="accent4" accent5="accent5" accent6="accent6" hlink="hlink" folHlink="folHlink"/>
   <p:sldLayoutIdLst>
-    <p:sldLayoutId id="2147483829" r:id="rId1"/>
-    <p:sldLayoutId id="2147483830" r:id="rId2"/>
-    <p:sldLayoutId id="2147483831" r:id="rId3"/>
-    <p:sldLayoutId id="2147483832" r:id="rId4"/>
-    <p:sldLayoutId id="2147483833" r:id="rId5"/>
-    <p:sldLayoutId id="2147483834" r:id="rId6"/>
-    <p:sldLayoutId id="2147483835" r:id="rId7"/>
-    <p:sldLayoutId id="2147483836" r:id="rId8"/>
-    <p:sldLayoutId id="2147483837" r:id="rId9"/>
-    <p:sldLayoutId id="2147483838" r:id="rId10"/>
-    <p:sldLayoutId id="2147483839" r:id="rId11"/>
+    <p:sldLayoutId id="2147483865" r:id="rId1"/>
+    <p:sldLayoutId id="2147483866" r:id="rId2"/>
+    <p:sldLayoutId id="2147483867" r:id="rId3"/>
+    <p:sldLayoutId id="2147483868" r:id="rId4"/>
+    <p:sldLayoutId id="2147483869" r:id="rId5"/>
+    <p:sldLayoutId id="2147483870" r:id="rId6"/>
+    <p:sldLayoutId id="2147483871" r:id="rId7"/>
+    <p:sldLayoutId id="2147483872" r:id="rId8"/>
+    <p:sldLayoutId id="2147483873" r:id="rId9"/>
+    <p:sldLayoutId id="2147483874" r:id="rId10"/>
+    <p:sldLayoutId id="2147483875" r:id="rId11"/>
   </p:sldLayoutIdLst>
   <p:txStyles>
     <p:titleStyle>
@@ -3328,10 +3328,10 @@
       </p:grpSpPr>
       <p:pic>
         <p:nvPicPr>
-          <p:cNvPr id="18" name="Picture 17">
+          <p:cNvPr id="38" name="Picture 37">
             <a:extLst>
               <a:ext uri="{FF2B5EF4-FFF2-40B4-BE49-F238E27FC236}">
-                <a16:creationId xmlns:a16="http://schemas.microsoft.com/office/drawing/2014/main" id="{14AD5565-DCF0-ED7C-8A1E-047BC5869F78}"/>
+                <a16:creationId xmlns:a16="http://schemas.microsoft.com/office/drawing/2014/main" id="{2723B8DD-CD45-9B18-C611-60429074FE45}"/>
               </a:ext>
             </a:extLst>
           </p:cNvPr>
@@ -3348,7 +3348,7 @@
         </p:blipFill>
         <p:spPr>
           <a:xfrm>
-            <a:off x="6350" y="0"/>
+            <a:off x="6350" y="654691"/>
             <a:ext cx="936625" cy="936625"/>
           </a:xfrm>
           <a:prstGeom prst="rect">
@@ -3356,12 +3356,82 @@
           </a:prstGeom>
         </p:spPr>
       </p:pic>
+      <p:sp>
+        <p:nvSpPr>
+          <p:cNvPr id="39" name="TextBox 38">
+            <a:extLst>
+              <a:ext uri="{FF2B5EF4-FFF2-40B4-BE49-F238E27FC236}">
+                <a16:creationId xmlns:a16="http://schemas.microsoft.com/office/drawing/2014/main" id="{1EC674B0-FB53-36A1-02CD-BD2611EB9695}"/>
+              </a:ext>
+            </a:extLst>
+          </p:cNvPr>
+          <p:cNvSpPr txBox="1"/>
+          <p:nvPr/>
+        </p:nvSpPr>
+        <p:spPr>
+          <a:xfrm>
+            <a:off x="-61132" y="613416"/>
+            <a:ext cx="171450" cy="184666"/>
+          </a:xfrm>
+          <a:prstGeom prst="rect">
+            <a:avLst/>
+          </a:prstGeom>
+          <a:noFill/>
+        </p:spPr>
+        <p:txBody>
+          <a:bodyPr wrap="square" rtlCol="0">
+            <a:spAutoFit/>
+          </a:bodyPr>
+          <a:lstStyle/>
+          <a:p>
+            <a:r>
+              <a:rPr lang="en-DE" sz="600" b="1" dirty="0"/>
+              <a:t>C</a:t>
+            </a:r>
+          </a:p>
+        </p:txBody>
+      </p:sp>
+      <p:sp>
+        <p:nvSpPr>
+          <p:cNvPr id="40" name="TextBox 39">
+            <a:extLst>
+              <a:ext uri="{FF2B5EF4-FFF2-40B4-BE49-F238E27FC236}">
+                <a16:creationId xmlns:a16="http://schemas.microsoft.com/office/drawing/2014/main" id="{AC8281D7-B8F4-8D87-87ED-E8069A4C7BE1}"/>
+              </a:ext>
+            </a:extLst>
+          </p:cNvPr>
+          <p:cNvSpPr txBox="1"/>
+          <p:nvPr/>
+        </p:nvSpPr>
+        <p:spPr>
+          <a:xfrm>
+            <a:off x="880268" y="613416"/>
+            <a:ext cx="171450" cy="184666"/>
+          </a:xfrm>
+          <a:prstGeom prst="rect">
+            <a:avLst/>
+          </a:prstGeom>
+          <a:noFill/>
+        </p:spPr>
+        <p:txBody>
+          <a:bodyPr wrap="square" rtlCol="0">
+            <a:spAutoFit/>
+          </a:bodyPr>
+          <a:lstStyle/>
+          <a:p>
+            <a:r>
+              <a:rPr lang="en-DE" sz="600" b="1" dirty="0"/>
+              <a:t>D</a:t>
+            </a:r>
+          </a:p>
+        </p:txBody>
+      </p:sp>
       <p:pic>
         <p:nvPicPr>
-          <p:cNvPr id="19" name="Picture 18">
+          <p:cNvPr id="41" name="Picture 40">
             <a:extLst>
               <a:ext uri="{FF2B5EF4-FFF2-40B4-BE49-F238E27FC236}">
-                <a16:creationId xmlns:a16="http://schemas.microsoft.com/office/drawing/2014/main" id="{FA30EAF7-0136-81BD-F2D6-E82A5768189C}"/>
+                <a16:creationId xmlns:a16="http://schemas.microsoft.com/office/drawing/2014/main" id="{FBBD86FA-7C91-F40B-EE5A-3E261A846731}"/>
               </a:ext>
             </a:extLst>
           </p:cNvPr>
@@ -3378,7 +3448,7 @@
         </p:blipFill>
         <p:spPr>
           <a:xfrm>
-            <a:off x="956468" y="3578"/>
+            <a:off x="965200" y="1591316"/>
             <a:ext cx="936625" cy="936625"/>
           </a:xfrm>
           <a:prstGeom prst="rect">
@@ -3386,82 +3456,12 @@
           </a:prstGeom>
         </p:spPr>
       </p:pic>
-      <p:sp>
-        <p:nvSpPr>
-          <p:cNvPr id="20" name="TextBox 19">
+      <p:pic>
+        <p:nvPicPr>
+          <p:cNvPr id="42" name="Picture 41">
             <a:extLst>
               <a:ext uri="{FF2B5EF4-FFF2-40B4-BE49-F238E27FC236}">
-                <a16:creationId xmlns:a16="http://schemas.microsoft.com/office/drawing/2014/main" id="{2256FB09-1372-0431-0009-0BB802DC3F87}"/>
-              </a:ext>
-            </a:extLst>
-          </p:cNvPr>
-          <p:cNvSpPr txBox="1"/>
-          <p:nvPr/>
-        </p:nvSpPr>
-        <p:spPr>
-          <a:xfrm>
-            <a:off x="-61132" y="-41275"/>
-            <a:ext cx="171450" cy="184666"/>
-          </a:xfrm>
-          <a:prstGeom prst="rect">
-            <a:avLst/>
-          </a:prstGeom>
-          <a:noFill/>
-        </p:spPr>
-        <p:txBody>
-          <a:bodyPr wrap="square" rtlCol="0">
-            <a:spAutoFit/>
-          </a:bodyPr>
-          <a:lstStyle/>
-          <a:p>
-            <a:r>
-              <a:rPr lang="en-DE" sz="600" b="1" dirty="0"/>
-              <a:t>A</a:t>
-            </a:r>
-          </a:p>
-        </p:txBody>
-      </p:sp>
-      <p:sp>
-        <p:nvSpPr>
-          <p:cNvPr id="21" name="TextBox 20">
-            <a:extLst>
-              <a:ext uri="{FF2B5EF4-FFF2-40B4-BE49-F238E27FC236}">
-                <a16:creationId xmlns:a16="http://schemas.microsoft.com/office/drawing/2014/main" id="{245C0F58-28FA-2F01-091D-9B0CEA763EDB}"/>
-              </a:ext>
-            </a:extLst>
-          </p:cNvPr>
-          <p:cNvSpPr txBox="1"/>
-          <p:nvPr/>
-        </p:nvSpPr>
-        <p:spPr>
-          <a:xfrm>
-            <a:off x="880268" y="-41275"/>
-            <a:ext cx="171450" cy="184666"/>
-          </a:xfrm>
-          <a:prstGeom prst="rect">
-            <a:avLst/>
-          </a:prstGeom>
-          <a:noFill/>
-        </p:spPr>
-        <p:txBody>
-          <a:bodyPr wrap="square" rtlCol="0">
-            <a:spAutoFit/>
-          </a:bodyPr>
-          <a:lstStyle/>
-          <a:p>
-            <a:r>
-              <a:rPr lang="en-DE" sz="600" b="1" dirty="0"/>
-              <a:t>B</a:t>
-            </a:r>
-          </a:p>
-        </p:txBody>
-      </p:sp>
-      <p:pic>
-        <p:nvPicPr>
-          <p:cNvPr id="22" name="Picture 21">
-            <a:extLst>
-              <a:ext uri="{FF2B5EF4-FFF2-40B4-BE49-F238E27FC236}">
-                <a16:creationId xmlns:a16="http://schemas.microsoft.com/office/drawing/2014/main" id="{DFAE98C2-01A2-F8E4-C084-5821EA2BE048}"/>
+                <a16:creationId xmlns:a16="http://schemas.microsoft.com/office/drawing/2014/main" id="{48503677-E2FC-FE9F-1FEB-9F0D14F49E4B}"/>
               </a:ext>
             </a:extLst>
           </p:cNvPr>
@@ -3478,7 +3478,7 @@
         </p:blipFill>
         <p:spPr>
           <a:xfrm>
-            <a:off x="965200" y="936625"/>
+            <a:off x="6350" y="1591315"/>
             <a:ext cx="936625" cy="936625"/>
           </a:xfrm>
           <a:prstGeom prst="rect">
@@ -3486,12 +3486,82 @@
           </a:prstGeom>
         </p:spPr>
       </p:pic>
+      <p:sp>
+        <p:nvSpPr>
+          <p:cNvPr id="43" name="TextBox 42">
+            <a:extLst>
+              <a:ext uri="{FF2B5EF4-FFF2-40B4-BE49-F238E27FC236}">
+                <a16:creationId xmlns:a16="http://schemas.microsoft.com/office/drawing/2014/main" id="{D4BAACA8-6C9D-2A8D-3FBB-A92DCA821A9C}"/>
+              </a:ext>
+            </a:extLst>
+          </p:cNvPr>
+          <p:cNvSpPr txBox="1"/>
+          <p:nvPr/>
+        </p:nvSpPr>
+        <p:spPr>
+          <a:xfrm>
+            <a:off x="-61723" y="1540258"/>
+            <a:ext cx="171450" cy="184666"/>
+          </a:xfrm>
+          <a:prstGeom prst="rect">
+            <a:avLst/>
+          </a:prstGeom>
+          <a:noFill/>
+        </p:spPr>
+        <p:txBody>
+          <a:bodyPr wrap="square" rtlCol="0">
+            <a:spAutoFit/>
+          </a:bodyPr>
+          <a:lstStyle/>
+          <a:p>
+            <a:r>
+              <a:rPr lang="en-DE" sz="600" b="1" dirty="0"/>
+              <a:t>E</a:t>
+            </a:r>
+          </a:p>
+        </p:txBody>
+      </p:sp>
+      <p:sp>
+        <p:nvSpPr>
+          <p:cNvPr id="44" name="TextBox 43">
+            <a:extLst>
+              <a:ext uri="{FF2B5EF4-FFF2-40B4-BE49-F238E27FC236}">
+                <a16:creationId xmlns:a16="http://schemas.microsoft.com/office/drawing/2014/main" id="{B328362E-5B26-0157-4C55-56C191301C67}"/>
+              </a:ext>
+            </a:extLst>
+          </p:cNvPr>
+          <p:cNvSpPr txBox="1"/>
+          <p:nvPr/>
+        </p:nvSpPr>
+        <p:spPr>
+          <a:xfrm>
+            <a:off x="880268" y="1540258"/>
+            <a:ext cx="171450" cy="184666"/>
+          </a:xfrm>
+          <a:prstGeom prst="rect">
+            <a:avLst/>
+          </a:prstGeom>
+          <a:noFill/>
+        </p:spPr>
+        <p:txBody>
+          <a:bodyPr wrap="square" rtlCol="0">
+            <a:spAutoFit/>
+          </a:bodyPr>
+          <a:lstStyle/>
+          <a:p>
+            <a:r>
+              <a:rPr lang="en-DE" sz="600" b="1" dirty="0"/>
+              <a:t>F</a:t>
+            </a:r>
+          </a:p>
+        </p:txBody>
+      </p:sp>
       <p:pic>
         <p:nvPicPr>
-          <p:cNvPr id="23" name="Picture 22">
+          <p:cNvPr id="45" name="Picture 44">
             <a:extLst>
               <a:ext uri="{FF2B5EF4-FFF2-40B4-BE49-F238E27FC236}">
-                <a16:creationId xmlns:a16="http://schemas.microsoft.com/office/drawing/2014/main" id="{B6D38640-E670-E06D-E24B-512880D11F6A}"/>
+                <a16:creationId xmlns:a16="http://schemas.microsoft.com/office/drawing/2014/main" id="{A3F77EE4-D1FB-8341-D812-DE42C7D2C9AB}"/>
               </a:ext>
             </a:extLst>
           </p:cNvPr>
@@ -3502,26 +3572,57 @@
         </p:nvPicPr>
         <p:blipFill>
           <a:blip r:embed="rId5"/>
+          <a:srcRect t="16703" r="8228" b="5205"/>
           <a:stretch>
             <a:fillRect/>
           </a:stretch>
         </p:blipFill>
         <p:spPr>
           <a:xfrm>
-            <a:off x="6350" y="936624"/>
-            <a:ext cx="936625" cy="936625"/>
+            <a:off x="958605" y="737241"/>
+            <a:ext cx="949813" cy="808234"/>
           </a:xfrm>
           <a:prstGeom prst="rect">
             <a:avLst/>
           </a:prstGeom>
         </p:spPr>
       </p:pic>
-      <p:sp>
-        <p:nvSpPr>
-          <p:cNvPr id="24" name="TextBox 23">
+      <p:pic>
+        <p:nvPicPr>
+          <p:cNvPr id="46" name="Picture 45">
             <a:extLst>
               <a:ext uri="{FF2B5EF4-FFF2-40B4-BE49-F238E27FC236}">
-                <a16:creationId xmlns:a16="http://schemas.microsoft.com/office/drawing/2014/main" id="{F5AADD2C-08C3-0796-DE27-442D147A308E}"/>
+                <a16:creationId xmlns:a16="http://schemas.microsoft.com/office/drawing/2014/main" id="{E763F5B6-F1DE-19A3-9E5E-023AD7B8CDDE}"/>
+              </a:ext>
+            </a:extLst>
+          </p:cNvPr>
+          <p:cNvPicPr>
+            <a:picLocks noChangeAspect="1"/>
+          </p:cNvPicPr>
+          <p:nvPr/>
+        </p:nvPicPr>
+        <p:blipFill>
+          <a:blip r:embed="rId6"/>
+          <a:stretch>
+            <a:fillRect/>
+          </a:stretch>
+        </p:blipFill>
+        <p:spPr>
+          <a:xfrm>
+            <a:off x="-6350" y="80815"/>
+            <a:ext cx="1908175" cy="572453"/>
+          </a:xfrm>
+          <a:prstGeom prst="rect">
+            <a:avLst/>
+          </a:prstGeom>
+        </p:spPr>
+      </p:pic>
+      <p:sp>
+        <p:nvSpPr>
+          <p:cNvPr id="47" name="TextBox 46">
+            <a:extLst>
+              <a:ext uri="{FF2B5EF4-FFF2-40B4-BE49-F238E27FC236}">
+                <a16:creationId xmlns:a16="http://schemas.microsoft.com/office/drawing/2014/main" id="{1E0CD1F9-88C0-9CB3-7B2B-CED13EE4B41A}"/>
               </a:ext>
             </a:extLst>
           </p:cNvPr>
@@ -3530,7 +3631,7 @@
         </p:nvSpPr>
         <p:spPr>
           <a:xfrm>
-            <a:off x="-61723" y="885567"/>
+            <a:off x="-69597" y="-51218"/>
             <a:ext cx="171450" cy="184666"/>
           </a:xfrm>
           <a:prstGeom prst="rect">
@@ -3546,17 +3647,17 @@
           <a:p>
             <a:r>
               <a:rPr lang="en-DE" sz="600" b="1" dirty="0"/>
-              <a:t>C</a:t>
-            </a:r>
-          </a:p>
-        </p:txBody>
-      </p:sp>
-      <p:sp>
-        <p:nvSpPr>
-          <p:cNvPr id="25" name="TextBox 24">
+              <a:t>A</a:t>
+            </a:r>
+          </a:p>
+        </p:txBody>
+      </p:sp>
+      <p:sp>
+        <p:nvSpPr>
+          <p:cNvPr id="48" name="TextBox 47">
             <a:extLst>
               <a:ext uri="{FF2B5EF4-FFF2-40B4-BE49-F238E27FC236}">
-                <a16:creationId xmlns:a16="http://schemas.microsoft.com/office/drawing/2014/main" id="{E980D72A-F029-CE8F-7E0A-264012562BC0}"/>
+                <a16:creationId xmlns:a16="http://schemas.microsoft.com/office/drawing/2014/main" id="{DD7AF3AF-7EEE-319B-C1BD-03A48BA0B56D}"/>
               </a:ext>
             </a:extLst>
           </p:cNvPr>
@@ -3565,7 +3666,7 @@
         </p:nvSpPr>
         <p:spPr>
           <a:xfrm>
-            <a:off x="880268" y="885567"/>
+            <a:off x="871803" y="-51218"/>
             <a:ext cx="171450" cy="184666"/>
           </a:xfrm>
           <a:prstGeom prst="rect">
@@ -3581,7 +3682,7 @@
           <a:p>
             <a:r>
               <a:rPr lang="en-DE" sz="600" b="1" dirty="0"/>
-              <a:t>D</a:t>
+              <a:t>B</a:t>
             </a:r>
           </a:p>
         </p:txBody>
